--- a/dittvin-cro-audit/dittvin-ecomhouse-pitch-EN.pptx
+++ b/dittvin-cro-audit/dittvin-ecomhouse-pitch-EN.pptx
@@ -4361,7 +4361,7 @@
           <p:nvPr/>
         </p:nvGraphicFramePr>
         <p:xfrm>
-          <a:off x="883767.5" y="2103120"/>
+          <a:off x="883767" y="2103120"/>
           <a:ext cx="10424156" cy="1463040"/>
         </p:xfrm>
         <a:graphic>
@@ -5223,7 +5223,7 @@
           <p:nvPr/>
         </p:nvGraphicFramePr>
         <p:xfrm>
-          <a:off x="883767.5" y="2377440"/>
+          <a:off x="883767" y="2377440"/>
           <a:ext cx="10424158" cy="2194560"/>
         </p:xfrm>
         <a:graphic>
@@ -7761,7 +7761,7 @@
           <p:nvPr/>
         </p:nvGraphicFramePr>
         <p:xfrm>
-          <a:off x="883767.5" y="4014216"/>
+          <a:off x="883767" y="4014216"/>
           <a:ext cx="10424158" cy="1682496"/>
         </p:xfrm>
         <a:graphic>
@@ -8508,7 +8508,7 @@
           <p:nvPr/>
         </p:nvGraphicFramePr>
         <p:xfrm>
-          <a:off x="883767.5" y="2596896"/>
+          <a:off x="883767" y="2596896"/>
           <a:ext cx="10424156" cy="1828800"/>
         </p:xfrm>
         <a:graphic>
@@ -9452,7 +9452,7 @@
           <p:nvPr/>
         </p:nvGraphicFramePr>
         <p:xfrm>
-          <a:off x="883767.5" y="2103120"/>
+          <a:off x="883767" y="2103120"/>
           <a:ext cx="10424158" cy="1828800"/>
         </p:xfrm>
         <a:graphic>
@@ -10315,7 +10315,7 @@
           <p:nvPr/>
         </p:nvGraphicFramePr>
         <p:xfrm>
-          <a:off x="883767.5" y="2377440"/>
+          <a:off x="883767" y="2377440"/>
           <a:ext cx="10424158" cy="2670048"/>
         </p:xfrm>
         <a:graphic>
@@ -33159,7 +33159,7 @@
           <p:nvPr/>
         </p:nvGraphicFramePr>
         <p:xfrm>
-          <a:off x="883767.5" y="2377440"/>
+          <a:off x="883767" y="2377440"/>
           <a:ext cx="10424158" cy="2194560"/>
         </p:xfrm>
         <a:graphic>
@@ -36253,7 +36253,7 @@
           <p:nvPr/>
         </p:nvGraphicFramePr>
         <p:xfrm>
-          <a:off x="883767.5" y="2377440"/>
+          <a:off x="883767" y="2377440"/>
           <a:ext cx="10424156" cy="1828800"/>
         </p:xfrm>
         <a:graphic>
@@ -37197,7 +37197,7 @@
           <p:nvPr/>
         </p:nvGraphicFramePr>
         <p:xfrm>
-          <a:off x="883767.5" y="2103120"/>
+          <a:off x="883767" y="2103120"/>
           <a:ext cx="10424158" cy="2560320"/>
         </p:xfrm>
         <a:graphic>
@@ -40050,7 +40050,7 @@
           <p:nvPr/>
         </p:nvGraphicFramePr>
         <p:xfrm>
-          <a:off x="883767.5" y="3922776"/>
+          <a:off x="883767" y="3922776"/>
           <a:ext cx="10424158" cy="1353312"/>
         </p:xfrm>
         <a:graphic>
@@ -46992,7 +46992,7 @@
           <p:nvPr/>
         </p:nvGraphicFramePr>
         <p:xfrm>
-          <a:off x="883767.5" y="2596896"/>
+          <a:off x="883767" y="2596896"/>
           <a:ext cx="10424158" cy="2999232"/>
         </p:xfrm>
         <a:graphic>

--- a/dittvin-cro-audit/dittvin-ecomhouse-pitch-EN.pptx
+++ b/dittvin-cro-audit/dittvin-ecomhouse-pitch-EN.pptx
@@ -55,6 +55,13 @@
     <p:sldId id="303" r:id="rId54"/>
     <p:sldId id="304" r:id="rId55"/>
     <p:sldId id="305" r:id="rId56"/>
+    <p:sldId id="306" r:id="rId57"/>
+    <p:sldId id="307" r:id="rId58"/>
+    <p:sldId id="308" r:id="rId59"/>
+    <p:sldId id="309" r:id="rId60"/>
+    <p:sldId id="310" r:id="rId61"/>
+    <p:sldId id="311" r:id="rId62"/>
+    <p:sldId id="312" r:id="rId63"/>
   </p:sldIdLst>
   <p:sldSz cx="12191695" cy="6858000" type="screen4x3"/>
   <p:notesSz cx="6858000" cy="9144000"/>
@@ -45462,6 +45469,4104 @@
       </p:sp>
       <p:sp>
         <p:nvSpPr>
+          <p:cNvPr id="7" name="TextBox 6"/>
+          <p:cNvSpPr txBox="1"/>
+          <p:nvPr/>
+        </p:nvSpPr>
+        <p:spPr>
+          <a:xfrm>
+            <a:off x="0" y="1828800"/>
+            <a:ext cx="12191695" cy="1828800"/>
+          </a:xfrm>
+          <a:prstGeom prst="rect">
+            <a:avLst/>
+          </a:prstGeom>
+          <a:noFill/>
+        </p:spPr>
+        <p:txBody>
+          <a:bodyPr wrap="square" lIns="0" rIns="0" tIns="0" bIns="0" anchor="ctr">
+            <a:spAutoFit/>
+          </a:bodyPr>
+          <a:lstStyle/>
+          <a:p>
+            <a:pPr algn="ctr"/>
+            <a:r>
+              <a:rPr sz="11000" b="0" i="0">
+                <a:solidFill>
+                  <a:srgbClr val="332A02"/>
+                </a:solidFill>
+                <a:latin typeface="Menlo"/>
+              </a:rPr>
+              <a:t>09</a:t>
+            </a:r>
+          </a:p>
+        </p:txBody>
+      </p:sp>
+      <p:sp>
+        <p:nvSpPr>
+          <p:cNvPr id="8" name="TextBox 7"/>
+          <p:cNvSpPr txBox="1"/>
+          <p:nvPr/>
+        </p:nvSpPr>
+        <p:spPr>
+          <a:xfrm>
+            <a:off x="0" y="3291840"/>
+            <a:ext cx="12191695" cy="274320"/>
+          </a:xfrm>
+          <a:prstGeom prst="rect">
+            <a:avLst/>
+          </a:prstGeom>
+          <a:noFill/>
+        </p:spPr>
+        <p:txBody>
+          <a:bodyPr wrap="square" lIns="0" rIns="0" tIns="0" bIns="0" anchor="t">
+            <a:spAutoFit/>
+          </a:bodyPr>
+          <a:lstStyle/>
+          <a:p>
+            <a:pPr algn="ctr"/>
+            <a:r>
+              <a:rPr sz="1100" b="1" i="0" spc="400">
+                <a:solidFill>
+                  <a:srgbClr val="F7D007"/>
+                </a:solidFill>
+                <a:latin typeface="Helvetica Neue"/>
+              </a:rPr>
+              <a:t/>
+            </a:r>
+          </a:p>
+        </p:txBody>
+      </p:sp>
+      <p:sp>
+        <p:nvSpPr>
+          <p:cNvPr id="9" name="TextBox 8"/>
+          <p:cNvSpPr txBox="1"/>
+          <p:nvPr/>
+        </p:nvSpPr>
+        <p:spPr>
+          <a:xfrm>
+            <a:off x="731520" y="3611880"/>
+            <a:ext cx="10728655" cy="822960"/>
+          </a:xfrm>
+          <a:prstGeom prst="rect">
+            <a:avLst/>
+          </a:prstGeom>
+          <a:noFill/>
+        </p:spPr>
+        <p:txBody>
+          <a:bodyPr wrap="square" lIns="0" rIns="0" tIns="0" bIns="0" anchor="t">
+            <a:spAutoFit/>
+          </a:bodyPr>
+          <a:lstStyle/>
+          <a:p>
+            <a:pPr algn="ctr"/>
+            <a:r>
+              <a:rPr sz="4400" b="1" i="0" spc="-100">
+                <a:solidFill>
+                  <a:srgbClr val="FFFFFF"/>
+                </a:solidFill>
+                <a:latin typeface="Helvetica Neue"/>
+              </a:rPr>
+              <a:t>Recommended Tests</a:t>
+            </a:r>
+          </a:p>
+        </p:txBody>
+      </p:sp>
+      <p:sp>
+        <p:nvSpPr>
+          <p:cNvPr id="10" name="TextBox 9"/>
+          <p:cNvSpPr txBox="1"/>
+          <p:nvPr/>
+        </p:nvSpPr>
+        <p:spPr>
+          <a:xfrm>
+            <a:off x="2103120" y="4480560"/>
+            <a:ext cx="7985455" cy="1097280"/>
+          </a:xfrm>
+          <a:prstGeom prst="rect">
+            <a:avLst/>
+          </a:prstGeom>
+          <a:noFill/>
+        </p:spPr>
+        <p:txBody>
+          <a:bodyPr wrap="square" lIns="0" rIns="0" tIns="0" bIns="0" anchor="t">
+            <a:spAutoFit/>
+          </a:bodyPr>
+          <a:lstStyle/>
+          <a:p>
+            <a:pPr algn="ctr"/>
+            <a:r>
+              <a:rPr sz="1300" b="0" i="0">
+                <a:solidFill>
+                  <a:srgbClr val="999999"/>
+                </a:solidFill>
+                <a:latin typeface="Helvetica Neue"/>
+              </a:rPr>
+              <a:t>The three highest leverage tests to run first, each mocked up on the real page.</a:t>
+            </a:r>
+          </a:p>
+        </p:txBody>
+      </p:sp>
+    </p:spTree>
+  </p:cSld>
+  <p:clrMapOvr>
+    <a:masterClrMapping/>
+  </p:clrMapOvr>
+</p:sld>
+</file>
+
+<file path=ppt/slides/slide51.xml><?xml version="1.0" encoding="utf-8"?>
+<p:sld xmlns:a="http://schemas.openxmlformats.org/drawingml/2006/main" xmlns:p="http://schemas.openxmlformats.org/presentationml/2006/main" xmlns:r="http://schemas.openxmlformats.org/officeDocument/2006/relationships">
+  <p:cSld>
+    <p:spTree>
+      <p:nvGrpSpPr>
+        <p:cNvPr id="1" name=""/>
+        <p:cNvGrpSpPr/>
+        <p:nvPr/>
+      </p:nvGrpSpPr>
+      <p:grpSpPr/>
+      <p:sp>
+        <p:nvSpPr>
+          <p:cNvPr id="2" name="Rectangle 1"/>
+          <p:cNvSpPr/>
+          <p:nvPr/>
+        </p:nvSpPr>
+        <p:spPr>
+          <a:xfrm>
+            <a:off x="0" y="0"/>
+            <a:ext cx="12191695" cy="6858000"/>
+          </a:xfrm>
+          <a:prstGeom prst="rect">
+            <a:avLst/>
+          </a:prstGeom>
+          <a:solidFill>
+            <a:srgbClr val="000000"/>
+          </a:solidFill>
+          <a:ln>
+            <a:noFill/>
+          </a:ln>
+        </p:spPr>
+        <p:style>
+          <a:lnRef idx="1">
+            <a:schemeClr val="accent1"/>
+          </a:lnRef>
+          <a:fillRef idx="3">
+            <a:schemeClr val="accent1"/>
+          </a:fillRef>
+          <a:effectRef idx="2">
+            <a:schemeClr val="accent1"/>
+          </a:effectRef>
+          <a:fontRef idx="minor">
+            <a:schemeClr val="lt1"/>
+          </a:fontRef>
+        </p:style>
+        <p:txBody>
+          <a:bodyPr rtlCol="0" anchor="ctr"/>
+          <a:lstStyle/>
+          <a:p>
+            <a:pPr algn="ctr"/>
+          </a:p>
+        </p:txBody>
+      </p:sp>
+      <p:pic>
+        <p:nvPicPr>
+          <p:cNvPr id="3" name="Picture 2" descr="ecomhouse-wordmark.png"/>
+          <p:cNvPicPr>
+            <a:picLocks noChangeAspect="1"/>
+          </p:cNvPicPr>
+          <p:nvPr/>
+        </p:nvPicPr>
+        <p:blipFill>
+          <a:blip r:embed="rId2"/>
+          <a:stretch>
+            <a:fillRect/>
+          </a:stretch>
+        </p:blipFill>
+        <p:spPr>
+          <a:xfrm>
+            <a:off x="292608" y="201168"/>
+            <a:ext cx="1873736" cy="201168"/>
+          </a:xfrm>
+          <a:prstGeom prst="rect">
+            <a:avLst/>
+          </a:prstGeom>
+        </p:spPr>
+      </p:pic>
+      <p:sp>
+        <p:nvSpPr>
+          <p:cNvPr id="4" name="TextBox 3"/>
+          <p:cNvSpPr txBox="1"/>
+          <p:nvPr/>
+        </p:nvSpPr>
+        <p:spPr>
+          <a:xfrm>
+            <a:off x="11475720" y="201168"/>
+            <a:ext cx="548640" cy="274320"/>
+          </a:xfrm>
+          <a:prstGeom prst="rect">
+            <a:avLst/>
+          </a:prstGeom>
+          <a:noFill/>
+        </p:spPr>
+        <p:txBody>
+          <a:bodyPr wrap="square" lIns="0" rIns="0" tIns="0" bIns="0" anchor="t">
+            <a:spAutoFit/>
+          </a:bodyPr>
+          <a:lstStyle/>
+          <a:p>
+            <a:pPr algn="r"/>
+            <a:r>
+              <a:rPr sz="1000" b="0" i="0">
+                <a:solidFill>
+                  <a:srgbClr val="EFEEEE"/>
+                </a:solidFill>
+                <a:latin typeface="Helvetica Neue"/>
+              </a:rPr>
+              <a:t>2026</a:t>
+            </a:r>
+          </a:p>
+        </p:txBody>
+      </p:sp>
+      <p:sp>
+        <p:nvSpPr>
+          <p:cNvPr id="5" name="TextBox 4"/>
+          <p:cNvSpPr txBox="1"/>
+          <p:nvPr/>
+        </p:nvSpPr>
+        <p:spPr>
+          <a:xfrm>
+            <a:off x="292608" y="6565392"/>
+            <a:ext cx="4114800" cy="228600"/>
+          </a:xfrm>
+          <a:prstGeom prst="rect">
+            <a:avLst/>
+          </a:prstGeom>
+          <a:noFill/>
+        </p:spPr>
+        <p:txBody>
+          <a:bodyPr wrap="square" lIns="0" rIns="0" tIns="0" bIns="0" anchor="t">
+            <a:spAutoFit/>
+          </a:bodyPr>
+          <a:lstStyle/>
+          <a:p>
+            <a:pPr algn="l"/>
+            <a:r>
+              <a:rPr sz="800" b="0" i="0" spc="150">
+                <a:solidFill>
+                  <a:srgbClr val="EFEEEE"/>
+                </a:solidFill>
+                <a:latin typeface="Helvetica Neue"/>
+              </a:rPr>
+              <a:t>ECOMHOUSE ©ALL RIGHTS RESERVED</a:t>
+            </a:r>
+          </a:p>
+        </p:txBody>
+      </p:sp>
+      <p:sp>
+        <p:nvSpPr>
+          <p:cNvPr id="6" name="TextBox 5"/>
+          <p:cNvSpPr txBox="1"/>
+          <p:nvPr/>
+        </p:nvSpPr>
+        <p:spPr>
+          <a:xfrm>
+            <a:off x="11475720" y="6565392"/>
+            <a:ext cx="548640" cy="228600"/>
+          </a:xfrm>
+          <a:prstGeom prst="rect">
+            <a:avLst/>
+          </a:prstGeom>
+          <a:noFill/>
+        </p:spPr>
+        <p:txBody>
+          <a:bodyPr wrap="square" lIns="0" rIns="0" tIns="0" bIns="0" anchor="t">
+            <a:spAutoFit/>
+          </a:bodyPr>
+          <a:lstStyle/>
+          <a:p>
+            <a:pPr algn="r"/>
+            <a:r>
+              <a:rPr sz="800" b="0" i="0">
+                <a:solidFill>
+                  <a:srgbClr val="EFEEEE"/>
+                </a:solidFill>
+                <a:latin typeface="Menlo"/>
+              </a:rPr>
+              <a:t>50</a:t>
+            </a:r>
+          </a:p>
+        </p:txBody>
+      </p:sp>
+      <p:sp>
+        <p:nvSpPr>
+          <p:cNvPr id="7" name="TextBox 6"/>
+          <p:cNvSpPr txBox="1"/>
+          <p:nvPr/>
+        </p:nvSpPr>
+        <p:spPr>
+          <a:xfrm>
+            <a:off x="640080" y="566928"/>
+            <a:ext cx="10911535" cy="228600"/>
+          </a:xfrm>
+          <a:prstGeom prst="rect">
+            <a:avLst/>
+          </a:prstGeom>
+          <a:noFill/>
+        </p:spPr>
+        <p:txBody>
+          <a:bodyPr wrap="square" lIns="0" rIns="0" tIns="0" bIns="0" anchor="t">
+            <a:spAutoFit/>
+          </a:bodyPr>
+          <a:lstStyle/>
+          <a:p>
+            <a:pPr algn="ctr"/>
+            <a:r>
+              <a:rPr sz="1000" b="1" i="0" spc="300">
+                <a:solidFill>
+                  <a:srgbClr val="F7D007"/>
+                </a:solidFill>
+                <a:latin typeface="Helvetica Neue"/>
+              </a:rPr>
+              <a:t>Test 01 · PDP</a:t>
+            </a:r>
+          </a:p>
+        </p:txBody>
+      </p:sp>
+      <p:sp>
+        <p:nvSpPr>
+          <p:cNvPr id="8" name="TextBox 7"/>
+          <p:cNvSpPr txBox="1"/>
+          <p:nvPr/>
+        </p:nvSpPr>
+        <p:spPr>
+          <a:xfrm>
+            <a:off x="640080" y="841248"/>
+            <a:ext cx="10911535" cy="640080"/>
+          </a:xfrm>
+          <a:prstGeom prst="rect">
+            <a:avLst/>
+          </a:prstGeom>
+          <a:noFill/>
+        </p:spPr>
+        <p:txBody>
+          <a:bodyPr wrap="square" lIns="0" rIns="0" tIns="0" bIns="0" anchor="t">
+            <a:spAutoFit/>
+          </a:bodyPr>
+          <a:lstStyle/>
+          <a:p>
+            <a:pPr algn="ctr"/>
+            <a:r>
+              <a:rPr sz="3000" b="1" i="0" spc="-50">
+                <a:solidFill>
+                  <a:srgbClr val="FFFFFF"/>
+                </a:solidFill>
+                <a:latin typeface="Helvetica Neue"/>
+              </a:rPr>
+              <a:t>PDP Legality &amp; Trust Block</a:t>
+            </a:r>
+          </a:p>
+        </p:txBody>
+      </p:sp>
+      <p:sp>
+        <p:nvSpPr>
+          <p:cNvPr id="9" name="TextBox 8"/>
+          <p:cNvSpPr txBox="1"/>
+          <p:nvPr/>
+        </p:nvSpPr>
+        <p:spPr>
+          <a:xfrm>
+            <a:off x="1828800" y="1463040"/>
+            <a:ext cx="8534095" cy="548640"/>
+          </a:xfrm>
+          <a:prstGeom prst="rect">
+            <a:avLst/>
+          </a:prstGeom>
+          <a:noFill/>
+        </p:spPr>
+        <p:txBody>
+          <a:bodyPr wrap="square" lIns="0" rIns="0" tIns="0" bIns="0" anchor="t">
+            <a:spAutoFit/>
+          </a:bodyPr>
+          <a:lstStyle/>
+          <a:p>
+            <a:pPr algn="ctr"/>
+            <a:r>
+              <a:rPr sz="1200" b="0" i="0">
+                <a:solidFill>
+                  <a:srgbClr val="999999"/>
+                </a:solidFill>
+                <a:latin typeface="Helvetica Neue"/>
+              </a:rPr>
+              <a:t>Hypothesis: answering "is this legal?" at the buy box lifts add to cart for the first time buyers who are most of the traffic, because the Systembolaget monopoly makes legitimacy the top objection.</a:t>
+            </a:r>
+          </a:p>
+        </p:txBody>
+      </p:sp>
+      <p:pic>
+        <p:nvPicPr>
+          <p:cNvPr id="10" name="Picture 9" descr="t1-hifi.jpeg"/>
+          <p:cNvPicPr>
+            <a:picLocks noChangeAspect="1"/>
+          </p:cNvPicPr>
+          <p:nvPr/>
+        </p:nvPicPr>
+        <p:blipFill>
+          <a:blip r:embed="rId3"/>
+          <a:stretch>
+            <a:fillRect/>
+          </a:stretch>
+        </p:blipFill>
+        <p:spPr>
+          <a:xfrm>
+            <a:off x="822960" y="1783080"/>
+            <a:ext cx="2070401" cy="4480560"/>
+          </a:xfrm>
+          <a:prstGeom prst="rect">
+            <a:avLst/>
+          </a:prstGeom>
+        </p:spPr>
+      </p:pic>
+      <p:sp>
+        <p:nvSpPr>
+          <p:cNvPr id="11" name="Rounded Rectangle 10"/>
+          <p:cNvSpPr/>
+          <p:nvPr/>
+        </p:nvSpPr>
+        <p:spPr>
+          <a:xfrm>
+            <a:off x="777240" y="1737360"/>
+            <a:ext cx="2161841" cy="4572000"/>
+          </a:xfrm>
+          <a:prstGeom prst="roundRect">
+            <a:avLst>
+              <a:gd name="adj" fmla="val 4000"/>
+            </a:avLst>
+          </a:prstGeom>
+          <a:noFill/>
+          <a:ln w="19050">
+            <a:solidFill>
+              <a:srgbClr val="303030"/>
+            </a:solidFill>
+          </a:ln>
+        </p:spPr>
+        <p:style>
+          <a:lnRef idx="1">
+            <a:schemeClr val="accent1"/>
+          </a:lnRef>
+          <a:fillRef idx="3">
+            <a:schemeClr val="accent1"/>
+          </a:fillRef>
+          <a:effectRef idx="2">
+            <a:schemeClr val="accent1"/>
+          </a:effectRef>
+          <a:fontRef idx="minor">
+            <a:schemeClr val="lt1"/>
+          </a:fontRef>
+        </p:style>
+        <p:txBody>
+          <a:bodyPr rtlCol="0" anchor="ctr"/>
+          <a:lstStyle/>
+          <a:p>
+            <a:pPr algn="ctr"/>
+          </a:p>
+        </p:txBody>
+      </p:sp>
+      <p:sp>
+        <p:nvSpPr>
+          <p:cNvPr id="12" name="TextBox 11"/>
+          <p:cNvSpPr txBox="1"/>
+          <p:nvPr/>
+        </p:nvSpPr>
+        <p:spPr>
+          <a:xfrm>
+            <a:off x="777240" y="6355080"/>
+            <a:ext cx="2253281" cy="274320"/>
+          </a:xfrm>
+          <a:prstGeom prst="rect">
+            <a:avLst/>
+          </a:prstGeom>
+          <a:noFill/>
+        </p:spPr>
+        <p:txBody>
+          <a:bodyPr wrap="square" lIns="0" rIns="0" tIns="0" bIns="0" anchor="t">
+            <a:spAutoFit/>
+          </a:bodyPr>
+          <a:lstStyle/>
+          <a:p>
+            <a:pPr algn="ctr"/>
+            <a:r>
+              <a:rPr sz="900" b="0" i="0" spc="100">
+                <a:solidFill>
+                  <a:srgbClr val="6B7C75"/>
+                </a:solidFill>
+                <a:latin typeface="Helvetica Neue"/>
+              </a:rPr>
+              <a:t>Variant mocked on the live PDP</a:t>
+            </a:r>
+          </a:p>
+        </p:txBody>
+      </p:sp>
+      <p:sp>
+        <p:nvSpPr>
+          <p:cNvPr id="13" name="Oval 12"/>
+          <p:cNvSpPr/>
+          <p:nvPr/>
+        </p:nvSpPr>
+        <p:spPr>
+          <a:xfrm>
+            <a:off x="3350561" y="1874520"/>
+            <a:ext cx="100584" cy="100584"/>
+          </a:xfrm>
+          <a:prstGeom prst="ellipse">
+            <a:avLst/>
+          </a:prstGeom>
+          <a:solidFill>
+            <a:srgbClr val="22C55E"/>
+          </a:solidFill>
+          <a:ln>
+            <a:noFill/>
+          </a:ln>
+        </p:spPr>
+        <p:style>
+          <a:lnRef idx="1">
+            <a:schemeClr val="accent1"/>
+          </a:lnRef>
+          <a:fillRef idx="3">
+            <a:schemeClr val="accent1"/>
+          </a:fillRef>
+          <a:effectRef idx="2">
+            <a:schemeClr val="accent1"/>
+          </a:effectRef>
+          <a:fontRef idx="minor">
+            <a:schemeClr val="lt1"/>
+          </a:fontRef>
+        </p:style>
+        <p:txBody>
+          <a:bodyPr rtlCol="0" anchor="ctr"/>
+          <a:lstStyle/>
+          <a:p>
+            <a:pPr algn="ctr"/>
+          </a:p>
+        </p:txBody>
+      </p:sp>
+      <p:sp>
+        <p:nvSpPr>
+          <p:cNvPr id="14" name="TextBox 13"/>
+          <p:cNvSpPr txBox="1"/>
+          <p:nvPr/>
+        </p:nvSpPr>
+        <p:spPr>
+          <a:xfrm>
+            <a:off x="3624881" y="1828800"/>
+            <a:ext cx="8018174" cy="822960"/>
+          </a:xfrm>
+          <a:prstGeom prst="rect">
+            <a:avLst/>
+          </a:prstGeom>
+          <a:noFill/>
+        </p:spPr>
+        <p:txBody>
+          <a:bodyPr wrap="square" lIns="0" rIns="0" tIns="0" bIns="0" anchor="t">
+            <a:spAutoFit/>
+          </a:bodyPr>
+          <a:lstStyle/>
+          <a:p>
+            <a:pPr algn="l">
+              <a:lnSpc>
+                <a:spcPct val="105000"/>
+              </a:lnSpc>
+            </a:pPr>
+            <a:r>
+              <a:rPr sz="1100" b="1" i="0">
+                <a:solidFill>
+                  <a:srgbClr val="FFFFFF"/>
+                </a:solidFill>
+                <a:latin typeface="Helvetica Neue"/>
+              </a:rPr>
+              <a:t>A plain "Är det lagligt? Ja." block </a:t>
+            </a:r>
+            <a:r>
+              <a:rPr sz="1100" b="0" i="0">
+                <a:solidFill>
+                  <a:srgbClr val="CCCCCC"/>
+                </a:solidFill>
+                <a:latin typeface="Helvetica Neue"/>
+              </a:rPr>
+              <a:t>under the buy box: Danish operator named, Skatteverket distance seller status, tax and VAT already included.</a:t>
+            </a:r>
+          </a:p>
+        </p:txBody>
+      </p:sp>
+      <p:sp>
+        <p:nvSpPr>
+          <p:cNvPr id="15" name="Oval 14"/>
+          <p:cNvSpPr/>
+          <p:nvPr/>
+        </p:nvSpPr>
+        <p:spPr>
+          <a:xfrm>
+            <a:off x="3350561" y="2377440"/>
+            <a:ext cx="100584" cy="100584"/>
+          </a:xfrm>
+          <a:prstGeom prst="ellipse">
+            <a:avLst/>
+          </a:prstGeom>
+          <a:solidFill>
+            <a:srgbClr val="22C55E"/>
+          </a:solidFill>
+          <a:ln>
+            <a:noFill/>
+          </a:ln>
+        </p:spPr>
+        <p:style>
+          <a:lnRef idx="1">
+            <a:schemeClr val="accent1"/>
+          </a:lnRef>
+          <a:fillRef idx="3">
+            <a:schemeClr val="accent1"/>
+          </a:fillRef>
+          <a:effectRef idx="2">
+            <a:schemeClr val="accent1"/>
+          </a:effectRef>
+          <a:fontRef idx="minor">
+            <a:schemeClr val="lt1"/>
+          </a:fontRef>
+        </p:style>
+        <p:txBody>
+          <a:bodyPr rtlCol="0" anchor="ctr"/>
+          <a:lstStyle/>
+          <a:p>
+            <a:pPr algn="ctr"/>
+          </a:p>
+        </p:txBody>
+      </p:sp>
+      <p:sp>
+        <p:nvSpPr>
+          <p:cNvPr id="16" name="TextBox 15"/>
+          <p:cNvSpPr txBox="1"/>
+          <p:nvPr/>
+        </p:nvSpPr>
+        <p:spPr>
+          <a:xfrm>
+            <a:off x="3624881" y="2331720"/>
+            <a:ext cx="8018174" cy="822960"/>
+          </a:xfrm>
+          <a:prstGeom prst="rect">
+            <a:avLst/>
+          </a:prstGeom>
+          <a:noFill/>
+        </p:spPr>
+        <p:txBody>
+          <a:bodyPr wrap="square" lIns="0" rIns="0" tIns="0" bIns="0" anchor="t">
+            <a:spAutoFit/>
+          </a:bodyPr>
+          <a:lstStyle/>
+          <a:p>
+            <a:pPr algn="l">
+              <a:lnSpc>
+                <a:spcPct val="105000"/>
+              </a:lnSpc>
+            </a:pPr>
+            <a:r>
+              <a:rPr sz="1100" b="1" i="0">
+                <a:solidFill>
+                  <a:srgbClr val="FFFFFF"/>
+                </a:solidFill>
+                <a:latin typeface="Helvetica Neue"/>
+              </a:rPr>
+              <a:t>Trustpilot proof moved to the decision point, </a:t>
+            </a:r>
+            <a:r>
+              <a:rPr sz="1100" b="0" i="0">
+                <a:solidFill>
+                  <a:srgbClr val="CCCCCC"/>
+                </a:solidFill>
+                <a:latin typeface="Helvetica Neue"/>
+              </a:rPr>
+              <a:t>the real 4,7 on 5,985 reviews, a Trygg e-handel mark, and the age check framed as reassurance, not a blocker.</a:t>
+            </a:r>
+          </a:p>
+        </p:txBody>
+      </p:sp>
+      <p:sp>
+        <p:nvSpPr>
+          <p:cNvPr id="17" name="Oval 16"/>
+          <p:cNvSpPr/>
+          <p:nvPr/>
+        </p:nvSpPr>
+        <p:spPr>
+          <a:xfrm>
+            <a:off x="3350561" y="2880360"/>
+            <a:ext cx="100584" cy="100584"/>
+          </a:xfrm>
+          <a:prstGeom prst="ellipse">
+            <a:avLst/>
+          </a:prstGeom>
+          <a:solidFill>
+            <a:srgbClr val="22C55E"/>
+          </a:solidFill>
+          <a:ln>
+            <a:noFill/>
+          </a:ln>
+        </p:spPr>
+        <p:style>
+          <a:lnRef idx="1">
+            <a:schemeClr val="accent1"/>
+          </a:lnRef>
+          <a:fillRef idx="3">
+            <a:schemeClr val="accent1"/>
+          </a:fillRef>
+          <a:effectRef idx="2">
+            <a:schemeClr val="accent1"/>
+          </a:effectRef>
+          <a:fontRef idx="minor">
+            <a:schemeClr val="lt1"/>
+          </a:fontRef>
+        </p:style>
+        <p:txBody>
+          <a:bodyPr rtlCol="0" anchor="ctr"/>
+          <a:lstStyle/>
+          <a:p>
+            <a:pPr algn="ctr"/>
+          </a:p>
+        </p:txBody>
+      </p:sp>
+      <p:sp>
+        <p:nvSpPr>
+          <p:cNvPr id="18" name="TextBox 17"/>
+          <p:cNvSpPr txBox="1"/>
+          <p:nvPr/>
+        </p:nvSpPr>
+        <p:spPr>
+          <a:xfrm>
+            <a:off x="3624881" y="2834640"/>
+            <a:ext cx="8018174" cy="822960"/>
+          </a:xfrm>
+          <a:prstGeom prst="rect">
+            <a:avLst/>
+          </a:prstGeom>
+          <a:noFill/>
+        </p:spPr>
+        <p:txBody>
+          <a:bodyPr wrap="square" lIns="0" rIns="0" tIns="0" bIns="0" anchor="t">
+            <a:spAutoFit/>
+          </a:bodyPr>
+          <a:lstStyle/>
+          <a:p>
+            <a:pPr algn="l">
+              <a:lnSpc>
+                <a:spcPct val="105000"/>
+              </a:lnSpc>
+            </a:pPr>
+            <a:r>
+              <a:rPr sz="1100" b="1" i="0">
+                <a:solidFill>
+                  <a:srgbClr val="FFFFFF"/>
+                </a:solidFill>
+                <a:latin typeface="Helvetica Neue"/>
+              </a:rPr>
+              <a:t>Honest delivery line </a:t>
+            </a:r>
+            <a:r>
+              <a:rPr sz="1100" b="0" i="0">
+                <a:solidFill>
+                  <a:srgbClr val="CCCCCC"/>
+                </a:solidFill>
+                <a:latin typeface="Helvetica Neue"/>
+              </a:rPr>
+              <a:t>(2 to 5 arbetsdagar) replaces the vague "snabb hemleverans", plus a per bottle price to frame value.</a:t>
+            </a:r>
+          </a:p>
+        </p:txBody>
+      </p:sp>
+    </p:spTree>
+  </p:cSld>
+  <p:clrMapOvr>
+    <a:masterClrMapping/>
+  </p:clrMapOvr>
+</p:sld>
+</file>
+
+<file path=ppt/slides/slide52.xml><?xml version="1.0" encoding="utf-8"?>
+<p:sld xmlns:a="http://schemas.openxmlformats.org/drawingml/2006/main" xmlns:p="http://schemas.openxmlformats.org/presentationml/2006/main" xmlns:r="http://schemas.openxmlformats.org/officeDocument/2006/relationships">
+  <p:cSld>
+    <p:spTree>
+      <p:nvGrpSpPr>
+        <p:cNvPr id="1" name=""/>
+        <p:cNvGrpSpPr/>
+        <p:nvPr/>
+      </p:nvGrpSpPr>
+      <p:grpSpPr/>
+      <p:sp>
+        <p:nvSpPr>
+          <p:cNvPr id="2" name="Rectangle 1"/>
+          <p:cNvSpPr/>
+          <p:nvPr/>
+        </p:nvSpPr>
+        <p:spPr>
+          <a:xfrm>
+            <a:off x="0" y="0"/>
+            <a:ext cx="12191695" cy="6858000"/>
+          </a:xfrm>
+          <a:prstGeom prst="rect">
+            <a:avLst/>
+          </a:prstGeom>
+          <a:solidFill>
+            <a:srgbClr val="000000"/>
+          </a:solidFill>
+          <a:ln>
+            <a:noFill/>
+          </a:ln>
+        </p:spPr>
+        <p:style>
+          <a:lnRef idx="1">
+            <a:schemeClr val="accent1"/>
+          </a:lnRef>
+          <a:fillRef idx="3">
+            <a:schemeClr val="accent1"/>
+          </a:fillRef>
+          <a:effectRef idx="2">
+            <a:schemeClr val="accent1"/>
+          </a:effectRef>
+          <a:fontRef idx="minor">
+            <a:schemeClr val="lt1"/>
+          </a:fontRef>
+        </p:style>
+        <p:txBody>
+          <a:bodyPr rtlCol="0" anchor="ctr"/>
+          <a:lstStyle/>
+          <a:p>
+            <a:pPr algn="ctr"/>
+          </a:p>
+        </p:txBody>
+      </p:sp>
+      <p:pic>
+        <p:nvPicPr>
+          <p:cNvPr id="3" name="Picture 2" descr="ecomhouse-wordmark.png"/>
+          <p:cNvPicPr>
+            <a:picLocks noChangeAspect="1"/>
+          </p:cNvPicPr>
+          <p:nvPr/>
+        </p:nvPicPr>
+        <p:blipFill>
+          <a:blip r:embed="rId2"/>
+          <a:stretch>
+            <a:fillRect/>
+          </a:stretch>
+        </p:blipFill>
+        <p:spPr>
+          <a:xfrm>
+            <a:off x="292608" y="201168"/>
+            <a:ext cx="1873736" cy="201168"/>
+          </a:xfrm>
+          <a:prstGeom prst="rect">
+            <a:avLst/>
+          </a:prstGeom>
+        </p:spPr>
+      </p:pic>
+      <p:sp>
+        <p:nvSpPr>
+          <p:cNvPr id="4" name="TextBox 3"/>
+          <p:cNvSpPr txBox="1"/>
+          <p:nvPr/>
+        </p:nvSpPr>
+        <p:spPr>
+          <a:xfrm>
+            <a:off x="11475720" y="201168"/>
+            <a:ext cx="548640" cy="274320"/>
+          </a:xfrm>
+          <a:prstGeom prst="rect">
+            <a:avLst/>
+          </a:prstGeom>
+          <a:noFill/>
+        </p:spPr>
+        <p:txBody>
+          <a:bodyPr wrap="square" lIns="0" rIns="0" tIns="0" bIns="0" anchor="t">
+            <a:spAutoFit/>
+          </a:bodyPr>
+          <a:lstStyle/>
+          <a:p>
+            <a:pPr algn="r"/>
+            <a:r>
+              <a:rPr sz="1000" b="0" i="0">
+                <a:solidFill>
+                  <a:srgbClr val="EFEEEE"/>
+                </a:solidFill>
+                <a:latin typeface="Helvetica Neue"/>
+              </a:rPr>
+              <a:t>2026</a:t>
+            </a:r>
+          </a:p>
+        </p:txBody>
+      </p:sp>
+      <p:sp>
+        <p:nvSpPr>
+          <p:cNvPr id="5" name="TextBox 4"/>
+          <p:cNvSpPr txBox="1"/>
+          <p:nvPr/>
+        </p:nvSpPr>
+        <p:spPr>
+          <a:xfrm>
+            <a:off x="292608" y="6565392"/>
+            <a:ext cx="4114800" cy="228600"/>
+          </a:xfrm>
+          <a:prstGeom prst="rect">
+            <a:avLst/>
+          </a:prstGeom>
+          <a:noFill/>
+        </p:spPr>
+        <p:txBody>
+          <a:bodyPr wrap="square" lIns="0" rIns="0" tIns="0" bIns="0" anchor="t">
+            <a:spAutoFit/>
+          </a:bodyPr>
+          <a:lstStyle/>
+          <a:p>
+            <a:pPr algn="l"/>
+            <a:r>
+              <a:rPr sz="800" b="0" i="0" spc="150">
+                <a:solidFill>
+                  <a:srgbClr val="EFEEEE"/>
+                </a:solidFill>
+                <a:latin typeface="Helvetica Neue"/>
+              </a:rPr>
+              <a:t>ECOMHOUSE ©ALL RIGHTS RESERVED</a:t>
+            </a:r>
+          </a:p>
+        </p:txBody>
+      </p:sp>
+      <p:sp>
+        <p:nvSpPr>
+          <p:cNvPr id="6" name="TextBox 5"/>
+          <p:cNvSpPr txBox="1"/>
+          <p:nvPr/>
+        </p:nvSpPr>
+        <p:spPr>
+          <a:xfrm>
+            <a:off x="11475720" y="6565392"/>
+            <a:ext cx="548640" cy="228600"/>
+          </a:xfrm>
+          <a:prstGeom prst="rect">
+            <a:avLst/>
+          </a:prstGeom>
+          <a:noFill/>
+        </p:spPr>
+        <p:txBody>
+          <a:bodyPr wrap="square" lIns="0" rIns="0" tIns="0" bIns="0" anchor="t">
+            <a:spAutoFit/>
+          </a:bodyPr>
+          <a:lstStyle/>
+          <a:p>
+            <a:pPr algn="r"/>
+            <a:r>
+              <a:rPr sz="800" b="0" i="0">
+                <a:solidFill>
+                  <a:srgbClr val="EFEEEE"/>
+                </a:solidFill>
+                <a:latin typeface="Menlo"/>
+              </a:rPr>
+              <a:t>51</a:t>
+            </a:r>
+          </a:p>
+        </p:txBody>
+      </p:sp>
+      <p:sp>
+        <p:nvSpPr>
+          <p:cNvPr id="7" name="TextBox 6"/>
+          <p:cNvSpPr txBox="1"/>
+          <p:nvPr/>
+        </p:nvSpPr>
+        <p:spPr>
+          <a:xfrm>
+            <a:off x="640080" y="566928"/>
+            <a:ext cx="10911535" cy="228600"/>
+          </a:xfrm>
+          <a:prstGeom prst="rect">
+            <a:avLst/>
+          </a:prstGeom>
+          <a:noFill/>
+        </p:spPr>
+        <p:txBody>
+          <a:bodyPr wrap="square" lIns="0" rIns="0" tIns="0" bIns="0" anchor="t">
+            <a:spAutoFit/>
+          </a:bodyPr>
+          <a:lstStyle/>
+          <a:p>
+            <a:pPr algn="ctr"/>
+            <a:r>
+              <a:rPr sz="1000" b="1" i="0" spc="300">
+                <a:solidFill>
+                  <a:srgbClr val="F7D007"/>
+                </a:solidFill>
+                <a:latin typeface="Helvetica Neue"/>
+              </a:rPr>
+              <a:t>Test 02 · Cart</a:t>
+            </a:r>
+          </a:p>
+        </p:txBody>
+      </p:sp>
+      <p:sp>
+        <p:nvSpPr>
+          <p:cNvPr id="8" name="TextBox 7"/>
+          <p:cNvSpPr txBox="1"/>
+          <p:nvPr/>
+        </p:nvSpPr>
+        <p:spPr>
+          <a:xfrm>
+            <a:off x="640080" y="841248"/>
+            <a:ext cx="10911535" cy="640080"/>
+          </a:xfrm>
+          <a:prstGeom prst="rect">
+            <a:avLst/>
+          </a:prstGeom>
+          <a:noFill/>
+        </p:spPr>
+        <p:txBody>
+          <a:bodyPr wrap="square" lIns="0" rIns="0" tIns="0" bIns="0" anchor="t">
+            <a:spAutoFit/>
+          </a:bodyPr>
+          <a:lstStyle/>
+          <a:p>
+            <a:pPr algn="ctr"/>
+            <a:r>
+              <a:rPr sz="3000" b="1" i="0" spc="-50">
+                <a:solidFill>
+                  <a:srgbClr val="FFFFFF"/>
+                </a:solidFill>
+                <a:latin typeface="Helvetica Neue"/>
+              </a:rPr>
+              <a:t>Cart Drawer: Shipping Clarity &amp; Checkout</a:t>
+            </a:r>
+          </a:p>
+        </p:txBody>
+      </p:sp>
+      <p:sp>
+        <p:nvSpPr>
+          <p:cNvPr id="9" name="TextBox 8"/>
+          <p:cNvSpPr txBox="1"/>
+          <p:nvPr/>
+        </p:nvSpPr>
+        <p:spPr>
+          <a:xfrm>
+            <a:off x="1828800" y="1463040"/>
+            <a:ext cx="8534095" cy="548640"/>
+          </a:xfrm>
+          <a:prstGeom prst="rect">
+            <a:avLst/>
+          </a:prstGeom>
+          <a:noFill/>
+        </p:spPr>
+        <p:txBody>
+          <a:bodyPr wrap="square" lIns="0" rIns="0" tIns="0" bIns="0" anchor="t">
+            <a:spAutoFit/>
+          </a:bodyPr>
+          <a:lstStyle/>
+          <a:p>
+            <a:pPr algn="ctr"/>
+            <a:r>
+              <a:rPr sz="1200" b="0" i="0">
+                <a:solidFill>
+                  <a:srgbClr val="999999"/>
+                </a:solidFill>
+                <a:latin typeface="Helvetica Neue"/>
+              </a:rPr>
+              <a:t>Hypothesis: removing shipping and delivery uncertainty inside the cart recovers the biggest leak, where most sessions that reach checkout never complete.</a:t>
+            </a:r>
+          </a:p>
+        </p:txBody>
+      </p:sp>
+      <p:pic>
+        <p:nvPicPr>
+          <p:cNvPr id="10" name="Picture 9" descr="t2-hifi.jpeg"/>
+          <p:cNvPicPr>
+            <a:picLocks noChangeAspect="1"/>
+          </p:cNvPicPr>
+          <p:nvPr/>
+        </p:nvPicPr>
+        <p:blipFill>
+          <a:blip r:embed="rId3"/>
+          <a:stretch>
+            <a:fillRect/>
+          </a:stretch>
+        </p:blipFill>
+        <p:spPr>
+          <a:xfrm>
+            <a:off x="822960" y="1783080"/>
+            <a:ext cx="2070401" cy="4480560"/>
+          </a:xfrm>
+          <a:prstGeom prst="rect">
+            <a:avLst/>
+          </a:prstGeom>
+        </p:spPr>
+      </p:pic>
+      <p:sp>
+        <p:nvSpPr>
+          <p:cNvPr id="11" name="Rounded Rectangle 10"/>
+          <p:cNvSpPr/>
+          <p:nvPr/>
+        </p:nvSpPr>
+        <p:spPr>
+          <a:xfrm>
+            <a:off x="777240" y="1737360"/>
+            <a:ext cx="2161841" cy="4572000"/>
+          </a:xfrm>
+          <a:prstGeom prst="roundRect">
+            <a:avLst>
+              <a:gd name="adj" fmla="val 4000"/>
+            </a:avLst>
+          </a:prstGeom>
+          <a:noFill/>
+          <a:ln w="19050">
+            <a:solidFill>
+              <a:srgbClr val="303030"/>
+            </a:solidFill>
+          </a:ln>
+        </p:spPr>
+        <p:style>
+          <a:lnRef idx="1">
+            <a:schemeClr val="accent1"/>
+          </a:lnRef>
+          <a:fillRef idx="3">
+            <a:schemeClr val="accent1"/>
+          </a:fillRef>
+          <a:effectRef idx="2">
+            <a:schemeClr val="accent1"/>
+          </a:effectRef>
+          <a:fontRef idx="minor">
+            <a:schemeClr val="lt1"/>
+          </a:fontRef>
+        </p:style>
+        <p:txBody>
+          <a:bodyPr rtlCol="0" anchor="ctr"/>
+          <a:lstStyle/>
+          <a:p>
+            <a:pPr algn="ctr"/>
+          </a:p>
+        </p:txBody>
+      </p:sp>
+      <p:sp>
+        <p:nvSpPr>
+          <p:cNvPr id="12" name="TextBox 11"/>
+          <p:cNvSpPr txBox="1"/>
+          <p:nvPr/>
+        </p:nvSpPr>
+        <p:spPr>
+          <a:xfrm>
+            <a:off x="777240" y="6355080"/>
+            <a:ext cx="2253281" cy="274320"/>
+          </a:xfrm>
+          <a:prstGeom prst="rect">
+            <a:avLst/>
+          </a:prstGeom>
+          <a:noFill/>
+        </p:spPr>
+        <p:txBody>
+          <a:bodyPr wrap="square" lIns="0" rIns="0" tIns="0" bIns="0" anchor="t">
+            <a:spAutoFit/>
+          </a:bodyPr>
+          <a:lstStyle/>
+          <a:p>
+            <a:pPr algn="ctr"/>
+            <a:r>
+              <a:rPr sz="900" b="0" i="0" spc="100">
+                <a:solidFill>
+                  <a:srgbClr val="6B7C75"/>
+                </a:solidFill>
+                <a:latin typeface="Helvetica Neue"/>
+              </a:rPr>
+              <a:t>Variant cart drawer, mocked on the live store</a:t>
+            </a:r>
+          </a:p>
+        </p:txBody>
+      </p:sp>
+      <p:sp>
+        <p:nvSpPr>
+          <p:cNvPr id="13" name="Oval 12"/>
+          <p:cNvSpPr/>
+          <p:nvPr/>
+        </p:nvSpPr>
+        <p:spPr>
+          <a:xfrm>
+            <a:off x="3350561" y="1874520"/>
+            <a:ext cx="100584" cy="100584"/>
+          </a:xfrm>
+          <a:prstGeom prst="ellipse">
+            <a:avLst/>
+          </a:prstGeom>
+          <a:solidFill>
+            <a:srgbClr val="22C55E"/>
+          </a:solidFill>
+          <a:ln>
+            <a:noFill/>
+          </a:ln>
+        </p:spPr>
+        <p:style>
+          <a:lnRef idx="1">
+            <a:schemeClr val="accent1"/>
+          </a:lnRef>
+          <a:fillRef idx="3">
+            <a:schemeClr val="accent1"/>
+          </a:fillRef>
+          <a:effectRef idx="2">
+            <a:schemeClr val="accent1"/>
+          </a:effectRef>
+          <a:fontRef idx="minor">
+            <a:schemeClr val="lt1"/>
+          </a:fontRef>
+        </p:style>
+        <p:txBody>
+          <a:bodyPr rtlCol="0" anchor="ctr"/>
+          <a:lstStyle/>
+          <a:p>
+            <a:pPr algn="ctr"/>
+          </a:p>
+        </p:txBody>
+      </p:sp>
+      <p:sp>
+        <p:nvSpPr>
+          <p:cNvPr id="14" name="TextBox 13"/>
+          <p:cNvSpPr txBox="1"/>
+          <p:nvPr/>
+        </p:nvSpPr>
+        <p:spPr>
+          <a:xfrm>
+            <a:off x="3624881" y="1828800"/>
+            <a:ext cx="8018174" cy="822960"/>
+          </a:xfrm>
+          <a:prstGeom prst="rect">
+            <a:avLst/>
+          </a:prstGeom>
+          <a:noFill/>
+        </p:spPr>
+        <p:txBody>
+          <a:bodyPr wrap="square" lIns="0" rIns="0" tIns="0" bIns="0" anchor="t">
+            <a:spAutoFit/>
+          </a:bodyPr>
+          <a:lstStyle/>
+          <a:p>
+            <a:pPr algn="l">
+              <a:lnSpc>
+                <a:spcPct val="105000"/>
+              </a:lnSpc>
+            </a:pPr>
+            <a:r>
+              <a:rPr sz="1100" b="1" i="0">
+                <a:solidFill>
+                  <a:srgbClr val="FFFFFF"/>
+                </a:solidFill>
+                <a:latin typeface="Helvetica Neue"/>
+              </a:rPr>
+              <a:t>Honest delivery block </a:t>
+            </a:r>
+            <a:r>
+              <a:rPr sz="1100" b="0" i="0">
+                <a:solidFill>
+                  <a:srgbClr val="CCCCCC"/>
+                </a:solidFill>
+                <a:latin typeface="Helvetica Neue"/>
+              </a:rPr>
+              <a:t>with a 2 to 5 day range and a promise you pick the day, replacing the "1-3 dagar" claim behind 86% of complaints.</a:t>
+            </a:r>
+          </a:p>
+        </p:txBody>
+      </p:sp>
+      <p:sp>
+        <p:nvSpPr>
+          <p:cNvPr id="15" name="Oval 14"/>
+          <p:cNvSpPr/>
+          <p:nvPr/>
+        </p:nvSpPr>
+        <p:spPr>
+          <a:xfrm>
+            <a:off x="3350561" y="2377440"/>
+            <a:ext cx="100584" cy="100584"/>
+          </a:xfrm>
+          <a:prstGeom prst="ellipse">
+            <a:avLst/>
+          </a:prstGeom>
+          <a:solidFill>
+            <a:srgbClr val="22C55E"/>
+          </a:solidFill>
+          <a:ln>
+            <a:noFill/>
+          </a:ln>
+        </p:spPr>
+        <p:style>
+          <a:lnRef idx="1">
+            <a:schemeClr val="accent1"/>
+          </a:lnRef>
+          <a:fillRef idx="3">
+            <a:schemeClr val="accent1"/>
+          </a:fillRef>
+          <a:effectRef idx="2">
+            <a:schemeClr val="accent1"/>
+          </a:effectRef>
+          <a:fontRef idx="minor">
+            <a:schemeClr val="lt1"/>
+          </a:fontRef>
+        </p:style>
+        <p:txBody>
+          <a:bodyPr rtlCol="0" anchor="ctr"/>
+          <a:lstStyle/>
+          <a:p>
+            <a:pPr algn="ctr"/>
+          </a:p>
+        </p:txBody>
+      </p:sp>
+      <p:sp>
+        <p:nvSpPr>
+          <p:cNvPr id="16" name="TextBox 15"/>
+          <p:cNvSpPr txBox="1"/>
+          <p:nvPr/>
+        </p:nvSpPr>
+        <p:spPr>
+          <a:xfrm>
+            <a:off x="3624881" y="2331720"/>
+            <a:ext cx="8018174" cy="822960"/>
+          </a:xfrm>
+          <a:prstGeom prst="rect">
+            <a:avLst/>
+          </a:prstGeom>
+          <a:noFill/>
+        </p:spPr>
+        <p:txBody>
+          <a:bodyPr wrap="square" lIns="0" rIns="0" tIns="0" bIns="0" anchor="t">
+            <a:spAutoFit/>
+          </a:bodyPr>
+          <a:lstStyle/>
+          <a:p>
+            <a:pPr algn="l">
+              <a:lnSpc>
+                <a:spcPct val="105000"/>
+              </a:lnSpc>
+            </a:pPr>
+            <a:r>
+              <a:rPr sz="1100" b="1" i="0">
+                <a:solidFill>
+                  <a:srgbClr val="FFFFFF"/>
+                </a:solidFill>
+                <a:latin typeface="Helvetica Neue"/>
+              </a:rPr>
+              <a:t>Free shipping made unambiguous, </a:t>
+            </a:r>
+            <a:r>
+              <a:rPr sz="1100" b="0" i="0">
+                <a:solidFill>
+                  <a:srgbClr val="CCCCCC"/>
+                </a:solidFill>
+                <a:latin typeface="Helvetica Neue"/>
+              </a:rPr>
+              <a:t>the Airmee condition stated up front and repeated at the total, so no surprise fee later.</a:t>
+            </a:r>
+          </a:p>
+        </p:txBody>
+      </p:sp>
+      <p:sp>
+        <p:nvSpPr>
+          <p:cNvPr id="17" name="Oval 16"/>
+          <p:cNvSpPr/>
+          <p:nvPr/>
+        </p:nvSpPr>
+        <p:spPr>
+          <a:xfrm>
+            <a:off x="3350561" y="2880360"/>
+            <a:ext cx="100584" cy="100584"/>
+          </a:xfrm>
+          <a:prstGeom prst="ellipse">
+            <a:avLst/>
+          </a:prstGeom>
+          <a:solidFill>
+            <a:srgbClr val="22C55E"/>
+          </a:solidFill>
+          <a:ln>
+            <a:noFill/>
+          </a:ln>
+        </p:spPr>
+        <p:style>
+          <a:lnRef idx="1">
+            <a:schemeClr val="accent1"/>
+          </a:lnRef>
+          <a:fillRef idx="3">
+            <a:schemeClr val="accent1"/>
+          </a:fillRef>
+          <a:effectRef idx="2">
+            <a:schemeClr val="accent1"/>
+          </a:effectRef>
+          <a:fontRef idx="minor">
+            <a:schemeClr val="lt1"/>
+          </a:fontRef>
+        </p:style>
+        <p:txBody>
+          <a:bodyPr rtlCol="0" anchor="ctr"/>
+          <a:lstStyle/>
+          <a:p>
+            <a:pPr algn="ctr"/>
+          </a:p>
+        </p:txBody>
+      </p:sp>
+      <p:sp>
+        <p:nvSpPr>
+          <p:cNvPr id="18" name="TextBox 17"/>
+          <p:cNvSpPr txBox="1"/>
+          <p:nvPr/>
+        </p:nvSpPr>
+        <p:spPr>
+          <a:xfrm>
+            <a:off x="3624881" y="2834640"/>
+            <a:ext cx="8018174" cy="822960"/>
+          </a:xfrm>
+          <a:prstGeom prst="rect">
+            <a:avLst/>
+          </a:prstGeom>
+          <a:noFill/>
+        </p:spPr>
+        <p:txBody>
+          <a:bodyPr wrap="square" lIns="0" rIns="0" tIns="0" bIns="0" anchor="t">
+            <a:spAutoFit/>
+          </a:bodyPr>
+          <a:lstStyle/>
+          <a:p>
+            <a:pPr algn="l">
+              <a:lnSpc>
+                <a:spcPct val="105000"/>
+              </a:lnSpc>
+            </a:pPr>
+            <a:r>
+              <a:rPr sz="1100" b="1" i="0">
+                <a:solidFill>
+                  <a:srgbClr val="FFFFFF"/>
+                </a:solidFill>
+                <a:latin typeface="Helvetica Neue"/>
+              </a:rPr>
+              <a:t>Trust at the moment of payment, </a:t>
+            </a:r>
+            <a:r>
+              <a:rPr sz="1100" b="0" i="0">
+                <a:solidFill>
+                  <a:srgbClr val="CCCCCC"/>
+                </a:solidFill>
+                <a:latin typeface="Helvetica Neue"/>
+              </a:rPr>
+              <a:t>tax and VAT included, Klarna and card marks, "trygg betalning", right before checkout.</a:t>
+            </a:r>
+          </a:p>
+        </p:txBody>
+      </p:sp>
+    </p:spTree>
+  </p:cSld>
+  <p:clrMapOvr>
+    <a:masterClrMapping/>
+  </p:clrMapOvr>
+</p:sld>
+</file>
+
+<file path=ppt/slides/slide53.xml><?xml version="1.0" encoding="utf-8"?>
+<p:sld xmlns:a="http://schemas.openxmlformats.org/drawingml/2006/main" xmlns:p="http://schemas.openxmlformats.org/presentationml/2006/main" xmlns:r="http://schemas.openxmlformats.org/officeDocument/2006/relationships">
+  <p:cSld>
+    <p:spTree>
+      <p:nvGrpSpPr>
+        <p:cNvPr id="1" name=""/>
+        <p:cNvGrpSpPr/>
+        <p:nvPr/>
+      </p:nvGrpSpPr>
+      <p:grpSpPr/>
+      <p:sp>
+        <p:nvSpPr>
+          <p:cNvPr id="2" name="Rectangle 1"/>
+          <p:cNvSpPr/>
+          <p:nvPr/>
+        </p:nvSpPr>
+        <p:spPr>
+          <a:xfrm>
+            <a:off x="0" y="0"/>
+            <a:ext cx="12191695" cy="6858000"/>
+          </a:xfrm>
+          <a:prstGeom prst="rect">
+            <a:avLst/>
+          </a:prstGeom>
+          <a:solidFill>
+            <a:srgbClr val="000000"/>
+          </a:solidFill>
+          <a:ln>
+            <a:noFill/>
+          </a:ln>
+        </p:spPr>
+        <p:style>
+          <a:lnRef idx="1">
+            <a:schemeClr val="accent1"/>
+          </a:lnRef>
+          <a:fillRef idx="3">
+            <a:schemeClr val="accent1"/>
+          </a:fillRef>
+          <a:effectRef idx="2">
+            <a:schemeClr val="accent1"/>
+          </a:effectRef>
+          <a:fontRef idx="minor">
+            <a:schemeClr val="lt1"/>
+          </a:fontRef>
+        </p:style>
+        <p:txBody>
+          <a:bodyPr rtlCol="0" anchor="ctr"/>
+          <a:lstStyle/>
+          <a:p>
+            <a:pPr algn="ctr"/>
+          </a:p>
+        </p:txBody>
+      </p:sp>
+      <p:pic>
+        <p:nvPicPr>
+          <p:cNvPr id="3" name="Picture 2" descr="ecomhouse-wordmark.png"/>
+          <p:cNvPicPr>
+            <a:picLocks noChangeAspect="1"/>
+          </p:cNvPicPr>
+          <p:nvPr/>
+        </p:nvPicPr>
+        <p:blipFill>
+          <a:blip r:embed="rId2"/>
+          <a:stretch>
+            <a:fillRect/>
+          </a:stretch>
+        </p:blipFill>
+        <p:spPr>
+          <a:xfrm>
+            <a:off x="292608" y="201168"/>
+            <a:ext cx="1873736" cy="201168"/>
+          </a:xfrm>
+          <a:prstGeom prst="rect">
+            <a:avLst/>
+          </a:prstGeom>
+        </p:spPr>
+      </p:pic>
+      <p:sp>
+        <p:nvSpPr>
+          <p:cNvPr id="4" name="TextBox 3"/>
+          <p:cNvSpPr txBox="1"/>
+          <p:nvPr/>
+        </p:nvSpPr>
+        <p:spPr>
+          <a:xfrm>
+            <a:off x="11475720" y="201168"/>
+            <a:ext cx="548640" cy="274320"/>
+          </a:xfrm>
+          <a:prstGeom prst="rect">
+            <a:avLst/>
+          </a:prstGeom>
+          <a:noFill/>
+        </p:spPr>
+        <p:txBody>
+          <a:bodyPr wrap="square" lIns="0" rIns="0" tIns="0" bIns="0" anchor="t">
+            <a:spAutoFit/>
+          </a:bodyPr>
+          <a:lstStyle/>
+          <a:p>
+            <a:pPr algn="r"/>
+            <a:r>
+              <a:rPr sz="1000" b="0" i="0">
+                <a:solidFill>
+                  <a:srgbClr val="EFEEEE"/>
+                </a:solidFill>
+                <a:latin typeface="Helvetica Neue"/>
+              </a:rPr>
+              <a:t>2026</a:t>
+            </a:r>
+          </a:p>
+        </p:txBody>
+      </p:sp>
+      <p:sp>
+        <p:nvSpPr>
+          <p:cNvPr id="5" name="TextBox 4"/>
+          <p:cNvSpPr txBox="1"/>
+          <p:nvPr/>
+        </p:nvSpPr>
+        <p:spPr>
+          <a:xfrm>
+            <a:off x="292608" y="6565392"/>
+            <a:ext cx="4114800" cy="228600"/>
+          </a:xfrm>
+          <a:prstGeom prst="rect">
+            <a:avLst/>
+          </a:prstGeom>
+          <a:noFill/>
+        </p:spPr>
+        <p:txBody>
+          <a:bodyPr wrap="square" lIns="0" rIns="0" tIns="0" bIns="0" anchor="t">
+            <a:spAutoFit/>
+          </a:bodyPr>
+          <a:lstStyle/>
+          <a:p>
+            <a:pPr algn="l"/>
+            <a:r>
+              <a:rPr sz="800" b="0" i="0" spc="150">
+                <a:solidFill>
+                  <a:srgbClr val="EFEEEE"/>
+                </a:solidFill>
+                <a:latin typeface="Helvetica Neue"/>
+              </a:rPr>
+              <a:t>ECOMHOUSE ©ALL RIGHTS RESERVED</a:t>
+            </a:r>
+          </a:p>
+        </p:txBody>
+      </p:sp>
+      <p:sp>
+        <p:nvSpPr>
+          <p:cNvPr id="6" name="TextBox 5"/>
+          <p:cNvSpPr txBox="1"/>
+          <p:nvPr/>
+        </p:nvSpPr>
+        <p:spPr>
+          <a:xfrm>
+            <a:off x="11475720" y="6565392"/>
+            <a:ext cx="548640" cy="228600"/>
+          </a:xfrm>
+          <a:prstGeom prst="rect">
+            <a:avLst/>
+          </a:prstGeom>
+          <a:noFill/>
+        </p:spPr>
+        <p:txBody>
+          <a:bodyPr wrap="square" lIns="0" rIns="0" tIns="0" bIns="0" anchor="t">
+            <a:spAutoFit/>
+          </a:bodyPr>
+          <a:lstStyle/>
+          <a:p>
+            <a:pPr algn="r"/>
+            <a:r>
+              <a:rPr sz="800" b="0" i="0">
+                <a:solidFill>
+                  <a:srgbClr val="EFEEEE"/>
+                </a:solidFill>
+                <a:latin typeface="Menlo"/>
+              </a:rPr>
+              <a:t>52</a:t>
+            </a:r>
+          </a:p>
+        </p:txBody>
+      </p:sp>
+      <p:sp>
+        <p:nvSpPr>
+          <p:cNvPr id="7" name="TextBox 6"/>
+          <p:cNvSpPr txBox="1"/>
+          <p:nvPr/>
+        </p:nvSpPr>
+        <p:spPr>
+          <a:xfrm>
+            <a:off x="640080" y="566928"/>
+            <a:ext cx="10911535" cy="228600"/>
+          </a:xfrm>
+          <a:prstGeom prst="rect">
+            <a:avLst/>
+          </a:prstGeom>
+          <a:noFill/>
+        </p:spPr>
+        <p:txBody>
+          <a:bodyPr wrap="square" lIns="0" rIns="0" tIns="0" bIns="0" anchor="t">
+            <a:spAutoFit/>
+          </a:bodyPr>
+          <a:lstStyle/>
+          <a:p>
+            <a:pPr algn="ctr"/>
+            <a:r>
+              <a:rPr sz="1000" b="1" i="0" spc="300">
+                <a:solidFill>
+                  <a:srgbClr val="F7D007"/>
+                </a:solidFill>
+                <a:latin typeface="Helvetica Neue"/>
+              </a:rPr>
+              <a:t>Test 03 · Box PDP</a:t>
+            </a:r>
+          </a:p>
+        </p:txBody>
+      </p:sp>
+      <p:sp>
+        <p:nvSpPr>
+          <p:cNvPr id="8" name="TextBox 7"/>
+          <p:cNvSpPr txBox="1"/>
+          <p:nvPr/>
+        </p:nvSpPr>
+        <p:spPr>
+          <a:xfrm>
+            <a:off x="640080" y="841248"/>
+            <a:ext cx="10911535" cy="640080"/>
+          </a:xfrm>
+          <a:prstGeom prst="rect">
+            <a:avLst/>
+          </a:prstGeom>
+          <a:noFill/>
+        </p:spPr>
+        <p:txBody>
+          <a:bodyPr wrap="square" lIns="0" rIns="0" tIns="0" bIns="0" anchor="t">
+            <a:spAutoFit/>
+          </a:bodyPr>
+          <a:lstStyle/>
+          <a:p>
+            <a:pPr algn="ctr"/>
+            <a:r>
+              <a:rPr sz="3000" b="1" i="0" spc="-50">
+                <a:solidFill>
+                  <a:srgbClr val="FFFFFF"/>
+                </a:solidFill>
+                <a:latin typeface="Helvetica Neue"/>
+              </a:rPr>
+              <a:t>Box PDP: AOV Ladder &amp; Per Wine Taste</a:t>
+            </a:r>
+          </a:p>
+        </p:txBody>
+      </p:sp>
+      <p:sp>
+        <p:nvSpPr>
+          <p:cNvPr id="9" name="TextBox 8"/>
+          <p:cNvSpPr txBox="1"/>
+          <p:nvPr/>
+        </p:nvSpPr>
+        <p:spPr>
+          <a:xfrm>
+            <a:off x="1828800" y="1463040"/>
+            <a:ext cx="8534095" cy="548640"/>
+          </a:xfrm>
+          <a:prstGeom prst="rect">
+            <a:avLst/>
+          </a:prstGeom>
+          <a:noFill/>
+        </p:spPr>
+        <p:txBody>
+          <a:bodyPr wrap="square" lIns="0" rIns="0" tIns="0" bIns="0" anchor="t">
+            <a:spAutoFit/>
+          </a:bodyPr>
+          <a:lstStyle/>
+          <a:p>
+            <a:pPr algn="ctr"/>
+            <a:r>
+              <a:rPr sz="1200" b="0" i="0">
+                <a:solidFill>
+                  <a:srgbClr val="999999"/>
+                </a:solidFill>
+                <a:latin typeface="Helvetica Neue"/>
+              </a:rPr>
+              <a:t>Hypothesis: a box tier ladder plus real per wine detail lifts order value and add to cart, because it removes the blind box risk behind the "how does it taste" objection.</a:t>
+            </a:r>
+          </a:p>
+        </p:txBody>
+      </p:sp>
+      <p:pic>
+        <p:nvPicPr>
+          <p:cNvPr id="10" name="Picture 9" descr="t3-hifi.jpeg"/>
+          <p:cNvPicPr>
+            <a:picLocks noChangeAspect="1"/>
+          </p:cNvPicPr>
+          <p:nvPr/>
+        </p:nvPicPr>
+        <p:blipFill>
+          <a:blip r:embed="rId3"/>
+          <a:stretch>
+            <a:fillRect/>
+          </a:stretch>
+        </p:blipFill>
+        <p:spPr>
+          <a:xfrm>
+            <a:off x="822960" y="1783080"/>
+            <a:ext cx="2070401" cy="4480560"/>
+          </a:xfrm>
+          <a:prstGeom prst="rect">
+            <a:avLst/>
+          </a:prstGeom>
+        </p:spPr>
+      </p:pic>
+      <p:sp>
+        <p:nvSpPr>
+          <p:cNvPr id="11" name="Rounded Rectangle 10"/>
+          <p:cNvSpPr/>
+          <p:nvPr/>
+        </p:nvSpPr>
+        <p:spPr>
+          <a:xfrm>
+            <a:off x="777240" y="1737360"/>
+            <a:ext cx="2161841" cy="4572000"/>
+          </a:xfrm>
+          <a:prstGeom prst="roundRect">
+            <a:avLst>
+              <a:gd name="adj" fmla="val 4000"/>
+            </a:avLst>
+          </a:prstGeom>
+          <a:noFill/>
+          <a:ln w="19050">
+            <a:solidFill>
+              <a:srgbClr val="303030"/>
+            </a:solidFill>
+          </a:ln>
+        </p:spPr>
+        <p:style>
+          <a:lnRef idx="1">
+            <a:schemeClr val="accent1"/>
+          </a:lnRef>
+          <a:fillRef idx="3">
+            <a:schemeClr val="accent1"/>
+          </a:fillRef>
+          <a:effectRef idx="2">
+            <a:schemeClr val="accent1"/>
+          </a:effectRef>
+          <a:fontRef idx="minor">
+            <a:schemeClr val="lt1"/>
+          </a:fontRef>
+        </p:style>
+        <p:txBody>
+          <a:bodyPr rtlCol="0" anchor="ctr"/>
+          <a:lstStyle/>
+          <a:p>
+            <a:pPr algn="ctr"/>
+          </a:p>
+        </p:txBody>
+      </p:sp>
+      <p:sp>
+        <p:nvSpPr>
+          <p:cNvPr id="12" name="TextBox 11"/>
+          <p:cNvSpPr txBox="1"/>
+          <p:nvPr/>
+        </p:nvSpPr>
+        <p:spPr>
+          <a:xfrm>
+            <a:off x="777240" y="6355080"/>
+            <a:ext cx="2253281" cy="274320"/>
+          </a:xfrm>
+          <a:prstGeom prst="rect">
+            <a:avLst/>
+          </a:prstGeom>
+          <a:noFill/>
+        </p:spPr>
+        <p:txBody>
+          <a:bodyPr wrap="square" lIns="0" rIns="0" tIns="0" bIns="0" anchor="t">
+            <a:spAutoFit/>
+          </a:bodyPr>
+          <a:lstStyle/>
+          <a:p>
+            <a:pPr algn="ctr"/>
+            <a:r>
+              <a:rPr sz="900" b="0" i="0" spc="100">
+                <a:solidFill>
+                  <a:srgbClr val="6B7C75"/>
+                </a:solidFill>
+                <a:latin typeface="Helvetica Neue"/>
+              </a:rPr>
+              <a:t>Variant box page, mocked on the live PDP</a:t>
+            </a:r>
+          </a:p>
+        </p:txBody>
+      </p:sp>
+      <p:sp>
+        <p:nvSpPr>
+          <p:cNvPr id="13" name="Oval 12"/>
+          <p:cNvSpPr/>
+          <p:nvPr/>
+        </p:nvSpPr>
+        <p:spPr>
+          <a:xfrm>
+            <a:off x="3350561" y="1874520"/>
+            <a:ext cx="100584" cy="100584"/>
+          </a:xfrm>
+          <a:prstGeom prst="ellipse">
+            <a:avLst/>
+          </a:prstGeom>
+          <a:solidFill>
+            <a:srgbClr val="22C55E"/>
+          </a:solidFill>
+          <a:ln>
+            <a:noFill/>
+          </a:ln>
+        </p:spPr>
+        <p:style>
+          <a:lnRef idx="1">
+            <a:schemeClr val="accent1"/>
+          </a:lnRef>
+          <a:fillRef idx="3">
+            <a:schemeClr val="accent1"/>
+          </a:fillRef>
+          <a:effectRef idx="2">
+            <a:schemeClr val="accent1"/>
+          </a:effectRef>
+          <a:fontRef idx="minor">
+            <a:schemeClr val="lt1"/>
+          </a:fontRef>
+        </p:style>
+        <p:txBody>
+          <a:bodyPr rtlCol="0" anchor="ctr"/>
+          <a:lstStyle/>
+          <a:p>
+            <a:pPr algn="ctr"/>
+          </a:p>
+        </p:txBody>
+      </p:sp>
+      <p:sp>
+        <p:nvSpPr>
+          <p:cNvPr id="14" name="TextBox 13"/>
+          <p:cNvSpPr txBox="1"/>
+          <p:nvPr/>
+        </p:nvSpPr>
+        <p:spPr>
+          <a:xfrm>
+            <a:off x="3624881" y="1828800"/>
+            <a:ext cx="8018174" cy="822960"/>
+          </a:xfrm>
+          <a:prstGeom prst="rect">
+            <a:avLst/>
+          </a:prstGeom>
+          <a:noFill/>
+        </p:spPr>
+        <p:txBody>
+          <a:bodyPr wrap="square" lIns="0" rIns="0" tIns="0" bIns="0" anchor="t">
+            <a:spAutoFit/>
+          </a:bodyPr>
+          <a:lstStyle/>
+          <a:p>
+            <a:pPr algn="l">
+              <a:lnSpc>
+                <a:spcPct val="105000"/>
+              </a:lnSpc>
+            </a:pPr>
+            <a:r>
+              <a:rPr sz="1100" b="1" i="0">
+                <a:solidFill>
+                  <a:srgbClr val="FFFFFF"/>
+                </a:solidFill>
+                <a:latin typeface="Helvetica Neue"/>
+              </a:rPr>
+              <a:t>A three tier box ladder </a:t>
+            </a:r>
+            <a:r>
+              <a:rPr sz="1100" b="0" i="0">
+                <a:solidFill>
+                  <a:srgbClr val="CCCCCC"/>
+                </a:solidFill>
+                <a:latin typeface="Helvetica Neue"/>
+              </a:rPr>
+              <a:t>(6, 12 XL, 12 Guld) with the 12 XL preselected as "populärast", anchoring buyers up from 567 toward the 700 SEK plus tiers.</a:t>
+            </a:r>
+          </a:p>
+        </p:txBody>
+      </p:sp>
+      <p:sp>
+        <p:nvSpPr>
+          <p:cNvPr id="15" name="Oval 14"/>
+          <p:cNvSpPr/>
+          <p:nvPr/>
+        </p:nvSpPr>
+        <p:spPr>
+          <a:xfrm>
+            <a:off x="3350561" y="2377440"/>
+            <a:ext cx="100584" cy="100584"/>
+          </a:xfrm>
+          <a:prstGeom prst="ellipse">
+            <a:avLst/>
+          </a:prstGeom>
+          <a:solidFill>
+            <a:srgbClr val="22C55E"/>
+          </a:solidFill>
+          <a:ln>
+            <a:noFill/>
+          </a:ln>
+        </p:spPr>
+        <p:style>
+          <a:lnRef idx="1">
+            <a:schemeClr val="accent1"/>
+          </a:lnRef>
+          <a:fillRef idx="3">
+            <a:schemeClr val="accent1"/>
+          </a:fillRef>
+          <a:effectRef idx="2">
+            <a:schemeClr val="accent1"/>
+          </a:effectRef>
+          <a:fontRef idx="minor">
+            <a:schemeClr val="lt1"/>
+          </a:fontRef>
+        </p:style>
+        <p:txBody>
+          <a:bodyPr rtlCol="0" anchor="ctr"/>
+          <a:lstStyle/>
+          <a:p>
+            <a:pPr algn="ctr"/>
+          </a:p>
+        </p:txBody>
+      </p:sp>
+      <p:sp>
+        <p:nvSpPr>
+          <p:cNvPr id="16" name="TextBox 15"/>
+          <p:cNvSpPr txBox="1"/>
+          <p:nvPr/>
+        </p:nvSpPr>
+        <p:spPr>
+          <a:xfrm>
+            <a:off x="3624881" y="2331720"/>
+            <a:ext cx="8018174" cy="822960"/>
+          </a:xfrm>
+          <a:prstGeom prst="rect">
+            <a:avLst/>
+          </a:prstGeom>
+          <a:noFill/>
+        </p:spPr>
+        <p:txBody>
+          <a:bodyPr wrap="square" lIns="0" rIns="0" tIns="0" bIns="0" anchor="t">
+            <a:spAutoFit/>
+          </a:bodyPr>
+          <a:lstStyle/>
+          <a:p>
+            <a:pPr algn="l">
+              <a:lnSpc>
+                <a:spcPct val="105000"/>
+              </a:lnSpc>
+            </a:pPr>
+            <a:r>
+              <a:rPr sz="1100" b="1" i="0">
+                <a:solidFill>
+                  <a:srgbClr val="FFFFFF"/>
+                </a:solidFill>
+                <a:latin typeface="Helvetica Neue"/>
+              </a:rPr>
+              <a:t>Per bottle value math </a:t>
+            </a:r>
+            <a:r>
+              <a:rPr sz="1100" b="0" i="0">
+                <a:solidFill>
+                  <a:srgbClr val="CCCCCC"/>
+                </a:solidFill>
+                <a:latin typeface="Helvetica Neue"/>
+              </a:rPr>
+              <a:t>(53 kr per bottle on the XL) makes the bigger box read as the smart buy, not the expensive one.</a:t>
+            </a:r>
+          </a:p>
+        </p:txBody>
+      </p:sp>
+      <p:sp>
+        <p:nvSpPr>
+          <p:cNvPr id="17" name="Oval 16"/>
+          <p:cNvSpPr/>
+          <p:nvPr/>
+        </p:nvSpPr>
+        <p:spPr>
+          <a:xfrm>
+            <a:off x="3350561" y="2880360"/>
+            <a:ext cx="100584" cy="100584"/>
+          </a:xfrm>
+          <a:prstGeom prst="ellipse">
+            <a:avLst/>
+          </a:prstGeom>
+          <a:solidFill>
+            <a:srgbClr val="22C55E"/>
+          </a:solidFill>
+          <a:ln>
+            <a:noFill/>
+          </a:ln>
+        </p:spPr>
+        <p:style>
+          <a:lnRef idx="1">
+            <a:schemeClr val="accent1"/>
+          </a:lnRef>
+          <a:fillRef idx="3">
+            <a:schemeClr val="accent1"/>
+          </a:fillRef>
+          <a:effectRef idx="2">
+            <a:schemeClr val="accent1"/>
+          </a:effectRef>
+          <a:fontRef idx="minor">
+            <a:schemeClr val="lt1"/>
+          </a:fontRef>
+        </p:style>
+        <p:txBody>
+          <a:bodyPr rtlCol="0" anchor="ctr"/>
+          <a:lstStyle/>
+          <a:p>
+            <a:pPr algn="ctr"/>
+          </a:p>
+        </p:txBody>
+      </p:sp>
+      <p:sp>
+        <p:nvSpPr>
+          <p:cNvPr id="18" name="TextBox 17"/>
+          <p:cNvSpPr txBox="1"/>
+          <p:nvPr/>
+        </p:nvSpPr>
+        <p:spPr>
+          <a:xfrm>
+            <a:off x="3624881" y="2834640"/>
+            <a:ext cx="8018174" cy="822960"/>
+          </a:xfrm>
+          <a:prstGeom prst="rect">
+            <a:avLst/>
+          </a:prstGeom>
+          <a:noFill/>
+        </p:spPr>
+        <p:txBody>
+          <a:bodyPr wrap="square" lIns="0" rIns="0" tIns="0" bIns="0" anchor="t">
+            <a:spAutoFit/>
+          </a:bodyPr>
+          <a:lstStyle/>
+          <a:p>
+            <a:pPr algn="l">
+              <a:lnSpc>
+                <a:spcPct val="105000"/>
+              </a:lnSpc>
+            </a:pPr>
+            <a:r>
+              <a:rPr sz="1100" b="1" i="0">
+                <a:solidFill>
+                  <a:srgbClr val="FFFFFF"/>
+                </a:solidFill>
+                <a:latin typeface="Helvetica Neue"/>
+              </a:rPr>
+              <a:t>"Vad ingår" opens the blind box, </a:t>
+            </a:r>
+            <a:r>
+              <a:rPr sz="1100" b="0" i="0">
+                <a:solidFill>
+                  <a:srgbClr val="CCCCCC"/>
+                </a:solidFill>
+                <a:latin typeface="Helvetica Neue"/>
+              </a:rPr>
+              <a:t>named wines, region, Vivino scores and a dry to sweet scale that answer the taste objection before it forms.</a:t>
+            </a:r>
+          </a:p>
+        </p:txBody>
+      </p:sp>
+    </p:spTree>
+  </p:cSld>
+  <p:clrMapOvr>
+    <a:masterClrMapping/>
+  </p:clrMapOvr>
+</p:sld>
+</file>
+
+<file path=ppt/slides/slide54.xml><?xml version="1.0" encoding="utf-8"?>
+<p:sld xmlns:a="http://schemas.openxmlformats.org/drawingml/2006/main" xmlns:p="http://schemas.openxmlformats.org/presentationml/2006/main" xmlns:r="http://schemas.openxmlformats.org/officeDocument/2006/relationships">
+  <p:cSld>
+    <p:spTree>
+      <p:nvGrpSpPr>
+        <p:cNvPr id="1" name=""/>
+        <p:cNvGrpSpPr/>
+        <p:nvPr/>
+      </p:nvGrpSpPr>
+      <p:grpSpPr/>
+      <p:sp>
+        <p:nvSpPr>
+          <p:cNvPr id="2" name="Rectangle 1"/>
+          <p:cNvSpPr/>
+          <p:nvPr/>
+        </p:nvSpPr>
+        <p:spPr>
+          <a:xfrm>
+            <a:off x="0" y="0"/>
+            <a:ext cx="12191695" cy="6858000"/>
+          </a:xfrm>
+          <a:prstGeom prst="rect">
+            <a:avLst/>
+          </a:prstGeom>
+          <a:solidFill>
+            <a:srgbClr val="000000"/>
+          </a:solidFill>
+          <a:ln>
+            <a:noFill/>
+          </a:ln>
+        </p:spPr>
+        <p:style>
+          <a:lnRef idx="1">
+            <a:schemeClr val="accent1"/>
+          </a:lnRef>
+          <a:fillRef idx="3">
+            <a:schemeClr val="accent1"/>
+          </a:fillRef>
+          <a:effectRef idx="2">
+            <a:schemeClr val="accent1"/>
+          </a:effectRef>
+          <a:fontRef idx="minor">
+            <a:schemeClr val="lt1"/>
+          </a:fontRef>
+        </p:style>
+        <p:txBody>
+          <a:bodyPr rtlCol="0" anchor="ctr"/>
+          <a:lstStyle/>
+          <a:p>
+            <a:pPr algn="ctr"/>
+          </a:p>
+        </p:txBody>
+      </p:sp>
+      <p:pic>
+        <p:nvPicPr>
+          <p:cNvPr id="3" name="Picture 2" descr="ecomhouse-wordmark.png"/>
+          <p:cNvPicPr>
+            <a:picLocks noChangeAspect="1"/>
+          </p:cNvPicPr>
+          <p:nvPr/>
+        </p:nvPicPr>
+        <p:blipFill>
+          <a:blip r:embed="rId2"/>
+          <a:stretch>
+            <a:fillRect/>
+          </a:stretch>
+        </p:blipFill>
+        <p:spPr>
+          <a:xfrm>
+            <a:off x="292608" y="201168"/>
+            <a:ext cx="1873736" cy="201168"/>
+          </a:xfrm>
+          <a:prstGeom prst="rect">
+            <a:avLst/>
+          </a:prstGeom>
+        </p:spPr>
+      </p:pic>
+      <p:sp>
+        <p:nvSpPr>
+          <p:cNvPr id="4" name="TextBox 3"/>
+          <p:cNvSpPr txBox="1"/>
+          <p:nvPr/>
+        </p:nvSpPr>
+        <p:spPr>
+          <a:xfrm>
+            <a:off x="11475720" y="201168"/>
+            <a:ext cx="548640" cy="274320"/>
+          </a:xfrm>
+          <a:prstGeom prst="rect">
+            <a:avLst/>
+          </a:prstGeom>
+          <a:noFill/>
+        </p:spPr>
+        <p:txBody>
+          <a:bodyPr wrap="square" lIns="0" rIns="0" tIns="0" bIns="0" anchor="t">
+            <a:spAutoFit/>
+          </a:bodyPr>
+          <a:lstStyle/>
+          <a:p>
+            <a:pPr algn="r"/>
+            <a:r>
+              <a:rPr sz="1000" b="0" i="0">
+                <a:solidFill>
+                  <a:srgbClr val="EFEEEE"/>
+                </a:solidFill>
+                <a:latin typeface="Helvetica Neue"/>
+              </a:rPr>
+              <a:t>2026</a:t>
+            </a:r>
+          </a:p>
+        </p:txBody>
+      </p:sp>
+      <p:sp>
+        <p:nvSpPr>
+          <p:cNvPr id="5" name="TextBox 4"/>
+          <p:cNvSpPr txBox="1"/>
+          <p:nvPr/>
+        </p:nvSpPr>
+        <p:spPr>
+          <a:xfrm>
+            <a:off x="292608" y="6565392"/>
+            <a:ext cx="4114800" cy="228600"/>
+          </a:xfrm>
+          <a:prstGeom prst="rect">
+            <a:avLst/>
+          </a:prstGeom>
+          <a:noFill/>
+        </p:spPr>
+        <p:txBody>
+          <a:bodyPr wrap="square" lIns="0" rIns="0" tIns="0" bIns="0" anchor="t">
+            <a:spAutoFit/>
+          </a:bodyPr>
+          <a:lstStyle/>
+          <a:p>
+            <a:pPr algn="l"/>
+            <a:r>
+              <a:rPr sz="800" b="0" i="0" spc="150">
+                <a:solidFill>
+                  <a:srgbClr val="EFEEEE"/>
+                </a:solidFill>
+                <a:latin typeface="Helvetica Neue"/>
+              </a:rPr>
+              <a:t>ECOMHOUSE ©ALL RIGHTS RESERVED</a:t>
+            </a:r>
+          </a:p>
+        </p:txBody>
+      </p:sp>
+      <p:sp>
+        <p:nvSpPr>
+          <p:cNvPr id="6" name="TextBox 5"/>
+          <p:cNvSpPr txBox="1"/>
+          <p:nvPr/>
+        </p:nvSpPr>
+        <p:spPr>
+          <a:xfrm>
+            <a:off x="11475720" y="6565392"/>
+            <a:ext cx="548640" cy="228600"/>
+          </a:xfrm>
+          <a:prstGeom prst="rect">
+            <a:avLst/>
+          </a:prstGeom>
+          <a:noFill/>
+        </p:spPr>
+        <p:txBody>
+          <a:bodyPr wrap="square" lIns="0" rIns="0" tIns="0" bIns="0" anchor="t">
+            <a:spAutoFit/>
+          </a:bodyPr>
+          <a:lstStyle/>
+          <a:p>
+            <a:pPr algn="r"/>
+            <a:r>
+              <a:rPr sz="800" b="0" i="0">
+                <a:solidFill>
+                  <a:srgbClr val="EFEEEE"/>
+                </a:solidFill>
+                <a:latin typeface="Menlo"/>
+              </a:rPr>
+              <a:t>53</a:t>
+            </a:r>
+          </a:p>
+        </p:txBody>
+      </p:sp>
+      <p:sp>
+        <p:nvSpPr>
+          <p:cNvPr id="7" name="TextBox 6"/>
+          <p:cNvSpPr txBox="1"/>
+          <p:nvPr/>
+        </p:nvSpPr>
+        <p:spPr>
+          <a:xfrm>
+            <a:off x="0" y="1828800"/>
+            <a:ext cx="12191695" cy="1828800"/>
+          </a:xfrm>
+          <a:prstGeom prst="rect">
+            <a:avLst/>
+          </a:prstGeom>
+          <a:noFill/>
+        </p:spPr>
+        <p:txBody>
+          <a:bodyPr wrap="square" lIns="0" rIns="0" tIns="0" bIns="0" anchor="ctr">
+            <a:spAutoFit/>
+          </a:bodyPr>
+          <a:lstStyle/>
+          <a:p>
+            <a:pPr algn="ctr"/>
+            <a:r>
+              <a:rPr sz="11000" b="0" i="0">
+                <a:solidFill>
+                  <a:srgbClr val="332A02"/>
+                </a:solidFill>
+                <a:latin typeface="Menlo"/>
+              </a:rPr>
+              <a:t>10</a:t>
+            </a:r>
+          </a:p>
+        </p:txBody>
+      </p:sp>
+      <p:sp>
+        <p:nvSpPr>
+          <p:cNvPr id="8" name="TextBox 7"/>
+          <p:cNvSpPr txBox="1"/>
+          <p:nvPr/>
+        </p:nvSpPr>
+        <p:spPr>
+          <a:xfrm>
+            <a:off x="0" y="3291840"/>
+            <a:ext cx="12191695" cy="274320"/>
+          </a:xfrm>
+          <a:prstGeom prst="rect">
+            <a:avLst/>
+          </a:prstGeom>
+          <a:noFill/>
+        </p:spPr>
+        <p:txBody>
+          <a:bodyPr wrap="square" lIns="0" rIns="0" tIns="0" bIns="0" anchor="t">
+            <a:spAutoFit/>
+          </a:bodyPr>
+          <a:lstStyle/>
+          <a:p>
+            <a:pPr algn="ctr"/>
+            <a:r>
+              <a:rPr sz="1100" b="1" i="0" spc="400">
+                <a:solidFill>
+                  <a:srgbClr val="F7D007"/>
+                </a:solidFill>
+                <a:latin typeface="Helvetica Neue"/>
+              </a:rPr>
+              <a:t/>
+            </a:r>
+          </a:p>
+        </p:txBody>
+      </p:sp>
+      <p:sp>
+        <p:nvSpPr>
+          <p:cNvPr id="9" name="TextBox 8"/>
+          <p:cNvSpPr txBox="1"/>
+          <p:nvPr/>
+        </p:nvSpPr>
+        <p:spPr>
+          <a:xfrm>
+            <a:off x="731520" y="3611880"/>
+            <a:ext cx="10728655" cy="822960"/>
+          </a:xfrm>
+          <a:prstGeom prst="rect">
+            <a:avLst/>
+          </a:prstGeom>
+          <a:noFill/>
+        </p:spPr>
+        <p:txBody>
+          <a:bodyPr wrap="square" lIns="0" rIns="0" tIns="0" bIns="0" anchor="t">
+            <a:spAutoFit/>
+          </a:bodyPr>
+          <a:lstStyle/>
+          <a:p>
+            <a:pPr algn="ctr"/>
+            <a:r>
+              <a:rPr sz="4400" b="1" i="0" spc="-100">
+                <a:solidFill>
+                  <a:srgbClr val="FFFFFF"/>
+                </a:solidFill>
+                <a:latin typeface="Helvetica Neue"/>
+              </a:rPr>
+              <a:t>Working With EcomHouse</a:t>
+            </a:r>
+          </a:p>
+        </p:txBody>
+      </p:sp>
+      <p:sp>
+        <p:nvSpPr>
+          <p:cNvPr id="10" name="TextBox 9"/>
+          <p:cNvSpPr txBox="1"/>
+          <p:nvPr/>
+        </p:nvSpPr>
+        <p:spPr>
+          <a:xfrm>
+            <a:off x="2103120" y="4480560"/>
+            <a:ext cx="7985455" cy="1097280"/>
+          </a:xfrm>
+          <a:prstGeom prst="rect">
+            <a:avLst/>
+          </a:prstGeom>
+          <a:noFill/>
+        </p:spPr>
+        <p:txBody>
+          <a:bodyPr wrap="square" lIns="0" rIns="0" tIns="0" bIns="0" anchor="t">
+            <a:spAutoFit/>
+          </a:bodyPr>
+          <a:lstStyle/>
+          <a:p>
+            <a:pPr algn="ctr"/>
+            <a:r>
+              <a:rPr sz="1300" b="0" i="0">
+                <a:solidFill>
+                  <a:srgbClr val="999999"/>
+                </a:solidFill>
+                <a:latin typeface="Helvetica Neue"/>
+              </a:rPr>
+              <a:t>How we test, and how we charge.</a:t>
+            </a:r>
+          </a:p>
+        </p:txBody>
+      </p:sp>
+    </p:spTree>
+  </p:cSld>
+  <p:clrMapOvr>
+    <a:masterClrMapping/>
+  </p:clrMapOvr>
+</p:sld>
+</file>
+
+<file path=ppt/slides/slide55.xml><?xml version="1.0" encoding="utf-8"?>
+<p:sld xmlns:a="http://schemas.openxmlformats.org/drawingml/2006/main" xmlns:p="http://schemas.openxmlformats.org/presentationml/2006/main" xmlns:r="http://schemas.openxmlformats.org/officeDocument/2006/relationships">
+  <p:cSld>
+    <p:spTree>
+      <p:nvGrpSpPr>
+        <p:cNvPr id="1" name=""/>
+        <p:cNvGrpSpPr/>
+        <p:nvPr/>
+      </p:nvGrpSpPr>
+      <p:grpSpPr/>
+      <p:sp>
+        <p:nvSpPr>
+          <p:cNvPr id="2" name="Rectangle 1"/>
+          <p:cNvSpPr/>
+          <p:nvPr/>
+        </p:nvSpPr>
+        <p:spPr>
+          <a:xfrm>
+            <a:off x="0" y="0"/>
+            <a:ext cx="12191695" cy="6858000"/>
+          </a:xfrm>
+          <a:prstGeom prst="rect">
+            <a:avLst/>
+          </a:prstGeom>
+          <a:solidFill>
+            <a:srgbClr val="000000"/>
+          </a:solidFill>
+          <a:ln>
+            <a:noFill/>
+          </a:ln>
+        </p:spPr>
+        <p:style>
+          <a:lnRef idx="1">
+            <a:schemeClr val="accent1"/>
+          </a:lnRef>
+          <a:fillRef idx="3">
+            <a:schemeClr val="accent1"/>
+          </a:fillRef>
+          <a:effectRef idx="2">
+            <a:schemeClr val="accent1"/>
+          </a:effectRef>
+          <a:fontRef idx="minor">
+            <a:schemeClr val="lt1"/>
+          </a:fontRef>
+        </p:style>
+        <p:txBody>
+          <a:bodyPr rtlCol="0" anchor="ctr"/>
+          <a:lstStyle/>
+          <a:p>
+            <a:pPr algn="ctr"/>
+          </a:p>
+        </p:txBody>
+      </p:sp>
+      <p:pic>
+        <p:nvPicPr>
+          <p:cNvPr id="3" name="Picture 2" descr="ecomhouse-wordmark.png"/>
+          <p:cNvPicPr>
+            <a:picLocks noChangeAspect="1"/>
+          </p:cNvPicPr>
+          <p:nvPr/>
+        </p:nvPicPr>
+        <p:blipFill>
+          <a:blip r:embed="rId2"/>
+          <a:stretch>
+            <a:fillRect/>
+          </a:stretch>
+        </p:blipFill>
+        <p:spPr>
+          <a:xfrm>
+            <a:off x="292608" y="201168"/>
+            <a:ext cx="1873736" cy="201168"/>
+          </a:xfrm>
+          <a:prstGeom prst="rect">
+            <a:avLst/>
+          </a:prstGeom>
+        </p:spPr>
+      </p:pic>
+      <p:sp>
+        <p:nvSpPr>
+          <p:cNvPr id="4" name="TextBox 3"/>
+          <p:cNvSpPr txBox="1"/>
+          <p:nvPr/>
+        </p:nvSpPr>
+        <p:spPr>
+          <a:xfrm>
+            <a:off x="11475720" y="201168"/>
+            <a:ext cx="548640" cy="274320"/>
+          </a:xfrm>
+          <a:prstGeom prst="rect">
+            <a:avLst/>
+          </a:prstGeom>
+          <a:noFill/>
+        </p:spPr>
+        <p:txBody>
+          <a:bodyPr wrap="square" lIns="0" rIns="0" tIns="0" bIns="0" anchor="t">
+            <a:spAutoFit/>
+          </a:bodyPr>
+          <a:lstStyle/>
+          <a:p>
+            <a:pPr algn="r"/>
+            <a:r>
+              <a:rPr sz="1000" b="0" i="0">
+                <a:solidFill>
+                  <a:srgbClr val="EFEEEE"/>
+                </a:solidFill>
+                <a:latin typeface="Helvetica Neue"/>
+              </a:rPr>
+              <a:t>2026</a:t>
+            </a:r>
+          </a:p>
+        </p:txBody>
+      </p:sp>
+      <p:sp>
+        <p:nvSpPr>
+          <p:cNvPr id="5" name="TextBox 4"/>
+          <p:cNvSpPr txBox="1"/>
+          <p:nvPr/>
+        </p:nvSpPr>
+        <p:spPr>
+          <a:xfrm>
+            <a:off x="292608" y="6565392"/>
+            <a:ext cx="4114800" cy="228600"/>
+          </a:xfrm>
+          <a:prstGeom prst="rect">
+            <a:avLst/>
+          </a:prstGeom>
+          <a:noFill/>
+        </p:spPr>
+        <p:txBody>
+          <a:bodyPr wrap="square" lIns="0" rIns="0" tIns="0" bIns="0" anchor="t">
+            <a:spAutoFit/>
+          </a:bodyPr>
+          <a:lstStyle/>
+          <a:p>
+            <a:pPr algn="l"/>
+            <a:r>
+              <a:rPr sz="800" b="0" i="0" spc="150">
+                <a:solidFill>
+                  <a:srgbClr val="EFEEEE"/>
+                </a:solidFill>
+                <a:latin typeface="Helvetica Neue"/>
+              </a:rPr>
+              <a:t>ECOMHOUSE ©ALL RIGHTS RESERVED</a:t>
+            </a:r>
+          </a:p>
+        </p:txBody>
+      </p:sp>
+      <p:sp>
+        <p:nvSpPr>
+          <p:cNvPr id="6" name="TextBox 5"/>
+          <p:cNvSpPr txBox="1"/>
+          <p:nvPr/>
+        </p:nvSpPr>
+        <p:spPr>
+          <a:xfrm>
+            <a:off x="11475720" y="6565392"/>
+            <a:ext cx="548640" cy="228600"/>
+          </a:xfrm>
+          <a:prstGeom prst="rect">
+            <a:avLst/>
+          </a:prstGeom>
+          <a:noFill/>
+        </p:spPr>
+        <p:txBody>
+          <a:bodyPr wrap="square" lIns="0" rIns="0" tIns="0" bIns="0" anchor="t">
+            <a:spAutoFit/>
+          </a:bodyPr>
+          <a:lstStyle/>
+          <a:p>
+            <a:pPr algn="r"/>
+            <a:r>
+              <a:rPr sz="800" b="0" i="0">
+                <a:solidFill>
+                  <a:srgbClr val="EFEEEE"/>
+                </a:solidFill>
+                <a:latin typeface="Menlo"/>
+              </a:rPr>
+              <a:t>54</a:t>
+            </a:r>
+          </a:p>
+        </p:txBody>
+      </p:sp>
+      <p:sp>
+        <p:nvSpPr>
+          <p:cNvPr id="7" name="TextBox 6"/>
+          <p:cNvSpPr txBox="1"/>
+          <p:nvPr/>
+        </p:nvSpPr>
+        <p:spPr>
+          <a:xfrm>
+            <a:off x="640080" y="566928"/>
+            <a:ext cx="10911535" cy="228600"/>
+          </a:xfrm>
+          <a:prstGeom prst="rect">
+            <a:avLst/>
+          </a:prstGeom>
+          <a:noFill/>
+        </p:spPr>
+        <p:txBody>
+          <a:bodyPr wrap="square" lIns="0" rIns="0" tIns="0" bIns="0" anchor="t">
+            <a:spAutoFit/>
+          </a:bodyPr>
+          <a:lstStyle/>
+          <a:p>
+            <a:pPr algn="ctr"/>
+            <a:r>
+              <a:rPr sz="1000" b="1" i="0" spc="300">
+                <a:solidFill>
+                  <a:srgbClr val="F7D007"/>
+                </a:solidFill>
+                <a:latin typeface="Helvetica Neue"/>
+              </a:rPr>
+              <a:t>Working With EcomHouse · Method</a:t>
+            </a:r>
+          </a:p>
+        </p:txBody>
+      </p:sp>
+      <p:sp>
+        <p:nvSpPr>
+          <p:cNvPr id="8" name="TextBox 7"/>
+          <p:cNvSpPr txBox="1"/>
+          <p:nvPr/>
+        </p:nvSpPr>
+        <p:spPr>
+          <a:xfrm>
+            <a:off x="640080" y="841248"/>
+            <a:ext cx="10911535" cy="640080"/>
+          </a:xfrm>
+          <a:prstGeom prst="rect">
+            <a:avLst/>
+          </a:prstGeom>
+          <a:noFill/>
+        </p:spPr>
+        <p:txBody>
+          <a:bodyPr wrap="square" lIns="0" rIns="0" tIns="0" bIns="0" anchor="t">
+            <a:spAutoFit/>
+          </a:bodyPr>
+          <a:lstStyle/>
+          <a:p>
+            <a:pPr algn="ctr"/>
+            <a:r>
+              <a:rPr sz="3000" b="1" i="0" spc="-50">
+                <a:solidFill>
+                  <a:srgbClr val="FFFFFF"/>
+                </a:solidFill>
+                <a:latin typeface="Helvetica Neue"/>
+              </a:rPr>
+              <a:t>How We Work: Six Steps, End to End</a:t>
+            </a:r>
+          </a:p>
+        </p:txBody>
+      </p:sp>
+      <p:sp>
+        <p:nvSpPr>
+          <p:cNvPr id="9" name="TextBox 8"/>
+          <p:cNvSpPr txBox="1"/>
+          <p:nvPr/>
+        </p:nvSpPr>
+        <p:spPr>
+          <a:xfrm>
+            <a:off x="1828800" y="1463040"/>
+            <a:ext cx="8534095" cy="548640"/>
+          </a:xfrm>
+          <a:prstGeom prst="rect">
+            <a:avLst/>
+          </a:prstGeom>
+          <a:noFill/>
+        </p:spPr>
+        <p:txBody>
+          <a:bodyPr wrap="square" lIns="0" rIns="0" tIns="0" bIns="0" anchor="t">
+            <a:spAutoFit/>
+          </a:bodyPr>
+          <a:lstStyle/>
+          <a:p>
+            <a:pPr algn="ctr"/>
+            <a:r>
+              <a:rPr sz="1200" b="0" i="0">
+                <a:solidFill>
+                  <a:srgbClr val="999999"/>
+                </a:solidFill>
+                <a:latin typeface="Helvetica Neue"/>
+              </a:rPr>
+              <a:t>A zero row service. You approve, we execute. Every step is owned by us, from research through build, QA and rollout. Your only required action is written approval at the brief and rollout stages.</a:t>
+            </a:r>
+          </a:p>
+        </p:txBody>
+      </p:sp>
+      <p:graphicFrame>
+        <p:nvGraphicFramePr>
+          <p:cNvPr id="10" name="Table 9"/>
+          <p:cNvGraphicFramePr>
+            <a:graphicFrameLocks noGrp="1"/>
+          </p:cNvGraphicFramePr>
+          <p:nvPr/>
+        </p:nvGraphicFramePr>
+        <p:xfrm>
+          <a:off x="883767" y="2286000"/>
+          <a:ext cx="10424160" cy="2560320"/>
+        </p:xfrm>
+        <a:graphic>
+          <a:graphicData uri="http://schemas.openxmlformats.org/drawingml/2006/table">
+            <a:tbl>
+              <a:tblPr>
+                <a:tableStyleId>{2D5ABB26-0587-4C30-8999-92F81FD0307C}</a:tableStyleId>
+              </a:tblPr>
+              <a:tblGrid>
+                <a:gridCol w="2084832"/>
+                <a:gridCol w="4169664"/>
+                <a:gridCol w="4169664"/>
+              </a:tblGrid>
+              <a:tr h="365760">
+                <a:tc>
+                  <a:txBody>
+                    <a:bodyPr wrap="square"/>
+                    <a:lstStyle/>
+                    <a:p>
+                      <a:pPr algn="l"/>
+                      <a:r>
+                        <a:rPr sz="900" b="1" spc="100">
+                          <a:solidFill>
+                            <a:srgbClr val="999999"/>
+                          </a:solidFill>
+                          <a:latin typeface="Helvetica Neue"/>
+                        </a:rPr>
+                        <a:t>#</a:t>
+                      </a:r>
+                    </a:p>
+                  </a:txBody>
+                  <a:tcPr marL="73152" marR="73152" marT="18288" marB="18288" anchor="ctr">
+                    <a:solidFill>
+                      <a:srgbClr val="0A0A0A"/>
+                    </a:solidFill>
+                  </a:tcPr>
+                </a:tc>
+                <a:tc>
+                  <a:txBody>
+                    <a:bodyPr wrap="square"/>
+                    <a:lstStyle/>
+                    <a:p>
+                      <a:pPr algn="l"/>
+                      <a:r>
+                        <a:rPr sz="900" b="1" spc="100">
+                          <a:solidFill>
+                            <a:srgbClr val="999999"/>
+                          </a:solidFill>
+                          <a:latin typeface="Helvetica Neue"/>
+                        </a:rPr>
+                        <a:t>STEP</a:t>
+                      </a:r>
+                    </a:p>
+                  </a:txBody>
+                  <a:tcPr marL="73152" marR="73152" marT="18288" marB="18288" anchor="ctr">
+                    <a:solidFill>
+                      <a:srgbClr val="0A0A0A"/>
+                    </a:solidFill>
+                  </a:tcPr>
+                </a:tc>
+                <a:tc>
+                  <a:txBody>
+                    <a:bodyPr wrap="square"/>
+                    <a:lstStyle/>
+                    <a:p>
+                      <a:pPr algn="l"/>
+                      <a:r>
+                        <a:rPr sz="900" b="1" spc="100">
+                          <a:solidFill>
+                            <a:srgbClr val="999999"/>
+                          </a:solidFill>
+                          <a:latin typeface="Helvetica Neue"/>
+                        </a:rPr>
+                        <a:t>WHAT WE DO</a:t>
+                      </a:r>
+                    </a:p>
+                  </a:txBody>
+                  <a:tcPr marL="73152" marR="73152" marT="18288" marB="18288" anchor="ctr">
+                    <a:solidFill>
+                      <a:srgbClr val="0A0A0A"/>
+                    </a:solidFill>
+                  </a:tcPr>
+                </a:tc>
+              </a:tr>
+              <a:tr h="365760">
+                <a:tc>
+                  <a:txBody>
+                    <a:bodyPr wrap="square"/>
+                    <a:lstStyle/>
+                    <a:p>
+                      <a:pPr algn="l"/>
+                      <a:r>
+                        <a:rPr sz="1100" b="1">
+                          <a:solidFill>
+                            <a:srgbClr val="F7D007"/>
+                          </a:solidFill>
+                          <a:latin typeface="Helvetica Neue"/>
+                        </a:rPr>
+                        <a:t>01</a:t>
+                      </a:r>
+                    </a:p>
+                  </a:txBody>
+                  <a:tcPr marL="73152" marR="73152" marT="18288" marB="18288" anchor="ctr">
+                    <a:solidFill>
+                      <a:srgbClr val="000000"/>
+                    </a:solidFill>
+                  </a:tcPr>
+                </a:tc>
+                <a:tc>
+                  <a:txBody>
+                    <a:bodyPr wrap="square"/>
+                    <a:lstStyle/>
+                    <a:p>
+                      <a:pPr algn="l"/>
+                      <a:r>
+                        <a:rPr sz="1100" b="0">
+                          <a:solidFill>
+                            <a:srgbClr val="F7D007"/>
+                          </a:solidFill>
+                          <a:latin typeface="Helvetica Neue"/>
+                        </a:rPr>
+                        <a:t>Research</a:t>
+                      </a:r>
+                    </a:p>
+                  </a:txBody>
+                  <a:tcPr marL="73152" marR="73152" marT="18288" marB="18288" anchor="ctr">
+                    <a:solidFill>
+                      <a:srgbClr val="000000"/>
+                    </a:solidFill>
+                  </a:tcPr>
+                </a:tc>
+                <a:tc>
+                  <a:txBody>
+                    <a:bodyPr wrap="square"/>
+                    <a:lstStyle/>
+                    <a:p>
+                      <a:pPr algn="l"/>
+                      <a:r>
+                        <a:rPr sz="1100" b="0">
+                          <a:solidFill>
+                            <a:srgbClr val="EFEEEE"/>
+                          </a:solidFill>
+                          <a:latin typeface="Helvetica Neue"/>
+                        </a:rPr>
+                        <a:t>GA4, Shopify, heatmaps, session recordings, reviews and support tickets.</a:t>
+                      </a:r>
+                    </a:p>
+                  </a:txBody>
+                  <a:tcPr marL="73152" marR="73152" marT="18288" marB="18288" anchor="ctr">
+                    <a:solidFill>
+                      <a:srgbClr val="000000"/>
+                    </a:solidFill>
+                  </a:tcPr>
+                </a:tc>
+              </a:tr>
+              <a:tr h="365760">
+                <a:tc>
+                  <a:txBody>
+                    <a:bodyPr wrap="square"/>
+                    <a:lstStyle/>
+                    <a:p>
+                      <a:pPr algn="l"/>
+                      <a:r>
+                        <a:rPr sz="1100" b="1">
+                          <a:solidFill>
+                            <a:srgbClr val="F7D007"/>
+                          </a:solidFill>
+                          <a:latin typeface="Helvetica Neue"/>
+                        </a:rPr>
+                        <a:t>02</a:t>
+                      </a:r>
+                    </a:p>
+                  </a:txBody>
+                  <a:tcPr marL="73152" marR="73152" marT="18288" marB="18288" anchor="ctr">
+                    <a:solidFill>
+                      <a:srgbClr val="0B0B0B"/>
+                    </a:solidFill>
+                  </a:tcPr>
+                </a:tc>
+                <a:tc>
+                  <a:txBody>
+                    <a:bodyPr wrap="square"/>
+                    <a:lstStyle/>
+                    <a:p>
+                      <a:pPr algn="l"/>
+                      <a:r>
+                        <a:rPr sz="1100" b="0">
+                          <a:solidFill>
+                            <a:srgbClr val="F7D007"/>
+                          </a:solidFill>
+                          <a:latin typeface="Helvetica Neue"/>
+                        </a:rPr>
+                        <a:t>Ideate</a:t>
+                      </a:r>
+                    </a:p>
+                  </a:txBody>
+                  <a:tcPr marL="73152" marR="73152" marT="18288" marB="18288" anchor="ctr">
+                    <a:solidFill>
+                      <a:srgbClr val="0B0B0B"/>
+                    </a:solidFill>
+                  </a:tcPr>
+                </a:tc>
+                <a:tc>
+                  <a:txBody>
+                    <a:bodyPr wrap="square"/>
+                    <a:lstStyle/>
+                    <a:p>
+                      <a:pPr algn="l"/>
+                      <a:r>
+                        <a:rPr sz="1100" b="0">
+                          <a:solidFill>
+                            <a:srgbClr val="EFEEEE"/>
+                          </a:solidFill>
+                          <a:latin typeface="Helvetica Neue"/>
+                        </a:rPr>
+                        <a:t>Hypothesis, variant concepts, copy and a Figma prototype.</a:t>
+                      </a:r>
+                    </a:p>
+                  </a:txBody>
+                  <a:tcPr marL="73152" marR="73152" marT="18288" marB="18288" anchor="ctr">
+                    <a:solidFill>
+                      <a:srgbClr val="0B0B0B"/>
+                    </a:solidFill>
+                  </a:tcPr>
+                </a:tc>
+              </a:tr>
+              <a:tr h="365760">
+                <a:tc>
+                  <a:txBody>
+                    <a:bodyPr wrap="square"/>
+                    <a:lstStyle/>
+                    <a:p>
+                      <a:pPr algn="l"/>
+                      <a:r>
+                        <a:rPr sz="1100" b="1">
+                          <a:solidFill>
+                            <a:srgbClr val="F7D007"/>
+                          </a:solidFill>
+                          <a:latin typeface="Helvetica Neue"/>
+                        </a:rPr>
+                        <a:t>03</a:t>
+                      </a:r>
+                    </a:p>
+                  </a:txBody>
+                  <a:tcPr marL="73152" marR="73152" marT="18288" marB="18288" anchor="ctr">
+                    <a:solidFill>
+                      <a:srgbClr val="000000"/>
+                    </a:solidFill>
+                  </a:tcPr>
+                </a:tc>
+                <a:tc>
+                  <a:txBody>
+                    <a:bodyPr wrap="square"/>
+                    <a:lstStyle/>
+                    <a:p>
+                      <a:pPr algn="l"/>
+                      <a:r>
+                        <a:rPr sz="1100" b="0">
+                          <a:solidFill>
+                            <a:srgbClr val="F7D007"/>
+                          </a:solidFill>
+                          <a:latin typeface="Helvetica Neue"/>
+                        </a:rPr>
+                        <a:t>Brief and approve</a:t>
+                      </a:r>
+                    </a:p>
+                  </a:txBody>
+                  <a:tcPr marL="73152" marR="73152" marT="18288" marB="18288" anchor="ctr">
+                    <a:solidFill>
+                      <a:srgbClr val="000000"/>
+                    </a:solidFill>
+                  </a:tcPr>
+                </a:tc>
+                <a:tc>
+                  <a:txBody>
+                    <a:bodyPr wrap="square"/>
+                    <a:lstStyle/>
+                    <a:p>
+                      <a:pPr algn="l"/>
+                      <a:r>
+                        <a:rPr sz="1100" b="0">
+                          <a:solidFill>
+                            <a:srgbClr val="EFEEEE"/>
+                          </a:solidFill>
+                          <a:latin typeface="Helvetica Neue"/>
+                        </a:rPr>
+                        <a:t>A written brief with the primary metric, confidence, sample size and stage multiplier. You approve before launch.</a:t>
+                      </a:r>
+                    </a:p>
+                  </a:txBody>
+                  <a:tcPr marL="73152" marR="73152" marT="18288" marB="18288" anchor="ctr">
+                    <a:solidFill>
+                      <a:srgbClr val="000000"/>
+                    </a:solidFill>
+                  </a:tcPr>
+                </a:tc>
+              </a:tr>
+              <a:tr h="365760">
+                <a:tc>
+                  <a:txBody>
+                    <a:bodyPr wrap="square"/>
+                    <a:lstStyle/>
+                    <a:p>
+                      <a:pPr algn="l"/>
+                      <a:r>
+                        <a:rPr sz="1100" b="1">
+                          <a:solidFill>
+                            <a:srgbClr val="F7D007"/>
+                          </a:solidFill>
+                          <a:latin typeface="Helvetica Neue"/>
+                        </a:rPr>
+                        <a:t>04</a:t>
+                      </a:r>
+                    </a:p>
+                  </a:txBody>
+                  <a:tcPr marL="73152" marR="73152" marT="18288" marB="18288" anchor="ctr">
+                    <a:solidFill>
+                      <a:srgbClr val="0B0B0B"/>
+                    </a:solidFill>
+                  </a:tcPr>
+                </a:tc>
+                <a:tc>
+                  <a:txBody>
+                    <a:bodyPr wrap="square"/>
+                    <a:lstStyle/>
+                    <a:p>
+                      <a:pPr algn="l"/>
+                      <a:r>
+                        <a:rPr sz="1100" b="0">
+                          <a:solidFill>
+                            <a:srgbClr val="F7D007"/>
+                          </a:solidFill>
+                          <a:latin typeface="Helvetica Neue"/>
+                        </a:rPr>
+                        <a:t>Build and QA</a:t>
+                      </a:r>
+                    </a:p>
+                  </a:txBody>
+                  <a:tcPr marL="73152" marR="73152" marT="18288" marB="18288" anchor="ctr">
+                    <a:solidFill>
+                      <a:srgbClr val="0B0B0B"/>
+                    </a:solidFill>
+                  </a:tcPr>
+                </a:tc>
+                <a:tc>
+                  <a:txBody>
+                    <a:bodyPr wrap="square"/>
+                    <a:lstStyle/>
+                    <a:p>
+                      <a:pPr algn="l"/>
+                      <a:r>
+                        <a:rPr sz="1100" b="0">
+                          <a:solidFill>
+                            <a:srgbClr val="EFEEEE"/>
+                          </a:solidFill>
+                          <a:latin typeface="Helvetica Neue"/>
+                        </a:rPr>
+                        <a:t>Shopify or test tool variant, tracked and QA'd across devices.</a:t>
+                      </a:r>
+                    </a:p>
+                  </a:txBody>
+                  <a:tcPr marL="73152" marR="73152" marT="18288" marB="18288" anchor="ctr">
+                    <a:solidFill>
+                      <a:srgbClr val="0B0B0B"/>
+                    </a:solidFill>
+                  </a:tcPr>
+                </a:tc>
+              </a:tr>
+              <a:tr h="365760">
+                <a:tc>
+                  <a:txBody>
+                    <a:bodyPr wrap="square"/>
+                    <a:lstStyle/>
+                    <a:p>
+                      <a:pPr algn="l"/>
+                      <a:r>
+                        <a:rPr sz="1100" b="1">
+                          <a:solidFill>
+                            <a:srgbClr val="F7D007"/>
+                          </a:solidFill>
+                          <a:latin typeface="Helvetica Neue"/>
+                        </a:rPr>
+                        <a:t>05</a:t>
+                      </a:r>
+                    </a:p>
+                  </a:txBody>
+                  <a:tcPr marL="73152" marR="73152" marT="18288" marB="18288" anchor="ctr">
+                    <a:solidFill>
+                      <a:srgbClr val="000000"/>
+                    </a:solidFill>
+                  </a:tcPr>
+                </a:tc>
+                <a:tc>
+                  <a:txBody>
+                    <a:bodyPr wrap="square"/>
+                    <a:lstStyle/>
+                    <a:p>
+                      <a:pPr algn="l"/>
+                      <a:r>
+                        <a:rPr sz="1100" b="0">
+                          <a:solidFill>
+                            <a:srgbClr val="F7D007"/>
+                          </a:solidFill>
+                          <a:latin typeface="Helvetica Neue"/>
+                        </a:rPr>
+                        <a:t>Run and monitor</a:t>
+                      </a:r>
+                    </a:p>
+                  </a:txBody>
+                  <a:tcPr marL="73152" marR="73152" marT="18288" marB="18288" anchor="ctr">
+                    <a:solidFill>
+                      <a:srgbClr val="000000"/>
+                    </a:solidFill>
+                  </a:tcPr>
+                </a:tc>
+                <a:tc>
+                  <a:txBody>
+                    <a:bodyPr wrap="square"/>
+                    <a:lstStyle/>
+                    <a:p>
+                      <a:pPr algn="l"/>
+                      <a:r>
+                        <a:rPr sz="1100" b="0">
+                          <a:solidFill>
+                            <a:srgbClr val="EFEEEE"/>
+                          </a:solidFill>
+                          <a:latin typeface="Helvetica Neue"/>
+                        </a:rPr>
+                        <a:t>Live test with guardrail watch and weekly progress updates.</a:t>
+                      </a:r>
+                    </a:p>
+                  </a:txBody>
+                  <a:tcPr marL="73152" marR="73152" marT="18288" marB="18288" anchor="ctr">
+                    <a:solidFill>
+                      <a:srgbClr val="000000"/>
+                    </a:solidFill>
+                  </a:tcPr>
+                </a:tc>
+              </a:tr>
+              <a:tr h="365760">
+                <a:tc>
+                  <a:txBody>
+                    <a:bodyPr wrap="square"/>
+                    <a:lstStyle/>
+                    <a:p>
+                      <a:pPr algn="l"/>
+                      <a:r>
+                        <a:rPr sz="1100" b="1">
+                          <a:solidFill>
+                            <a:srgbClr val="F7D007"/>
+                          </a:solidFill>
+                          <a:latin typeface="Helvetica Neue"/>
+                        </a:rPr>
+                        <a:t>06</a:t>
+                      </a:r>
+                    </a:p>
+                  </a:txBody>
+                  <a:tcPr marL="73152" marR="73152" marT="18288" marB="18288" anchor="ctr">
+                    <a:solidFill>
+                      <a:srgbClr val="0B0B0B"/>
+                    </a:solidFill>
+                  </a:tcPr>
+                </a:tc>
+                <a:tc>
+                  <a:txBody>
+                    <a:bodyPr wrap="square"/>
+                    <a:lstStyle/>
+                    <a:p>
+                      <a:pPr algn="l"/>
+                      <a:r>
+                        <a:rPr sz="1100" b="0">
+                          <a:solidFill>
+                            <a:srgbClr val="F7D007"/>
+                          </a:solidFill>
+                          <a:latin typeface="Helvetica Neue"/>
+                        </a:rPr>
+                        <a:t>Analyze and roll out</a:t>
+                      </a:r>
+                    </a:p>
+                  </a:txBody>
+                  <a:tcPr marL="73152" marR="73152" marT="18288" marB="18288" anchor="ctr">
+                    <a:solidFill>
+                      <a:srgbClr val="0B0B0B"/>
+                    </a:solidFill>
+                  </a:tcPr>
+                </a:tc>
+                <a:tc>
+                  <a:txBody>
+                    <a:bodyPr wrap="square"/>
+                    <a:lstStyle/>
+                    <a:p>
+                      <a:pPr algn="l"/>
+                      <a:r>
+                        <a:rPr sz="1100" b="0">
+                          <a:solidFill>
+                            <a:srgbClr val="EFEEEE"/>
+                          </a:solidFill>
+                          <a:latin typeface="Helvetica Neue"/>
+                        </a:rPr>
+                        <a:t>A written verdict, and winners rolled out to 100% of traffic.</a:t>
+                      </a:r>
+                    </a:p>
+                  </a:txBody>
+                  <a:tcPr marL="73152" marR="73152" marT="18288" marB="18288" anchor="ctr">
+                    <a:solidFill>
+                      <a:srgbClr val="0B0B0B"/>
+                    </a:solidFill>
+                  </a:tcPr>
+                </a:tc>
+              </a:tr>
+            </a:tbl>
+          </a:graphicData>
+        </a:graphic>
+      </p:graphicFrame>
+      <p:sp>
+        <p:nvSpPr>
+          <p:cNvPr id="11" name="TextBox 10"/>
+          <p:cNvSpPr txBox="1"/>
+          <p:nvPr/>
+        </p:nvSpPr>
+        <p:spPr>
+          <a:xfrm>
+            <a:off x="822960" y="6053328"/>
+            <a:ext cx="10545775" cy="731520"/>
+          </a:xfrm>
+          <a:prstGeom prst="rect">
+            <a:avLst/>
+          </a:prstGeom>
+          <a:noFill/>
+        </p:spPr>
+        <p:txBody>
+          <a:bodyPr wrap="square" lIns="0" rIns="0" tIns="0" bIns="0" anchor="t">
+            <a:spAutoFit/>
+          </a:bodyPr>
+          <a:lstStyle/>
+          <a:p>
+            <a:pPr algn="ctr"/>
+            <a:r>
+              <a:rPr sz="800" b="0" i="0">
+                <a:solidFill>
+                  <a:srgbClr val="6B7C75"/>
+                </a:solidFill>
+                <a:latin typeface="Helvetica Neue"/>
+              </a:rPr>
+              <a:t>Zero row service: you are not expected to do production work. The same method produced the RPV wins shown earlier in this deck (see "RPV Wins We Have Shipped"): trust, sticky add to cart and volume offers, each run to statistical significance.</a:t>
+            </a:r>
+          </a:p>
+        </p:txBody>
+      </p:sp>
+    </p:spTree>
+  </p:cSld>
+  <p:clrMapOvr>
+    <a:masterClrMapping/>
+  </p:clrMapOvr>
+</p:sld>
+</file>
+
+<file path=ppt/slides/slide56.xml><?xml version="1.0" encoding="utf-8"?>
+<p:sld xmlns:a="http://schemas.openxmlformats.org/drawingml/2006/main" xmlns:p="http://schemas.openxmlformats.org/presentationml/2006/main" xmlns:r="http://schemas.openxmlformats.org/officeDocument/2006/relationships">
+  <p:cSld>
+    <p:spTree>
+      <p:nvGrpSpPr>
+        <p:cNvPr id="1" name=""/>
+        <p:cNvGrpSpPr/>
+        <p:nvPr/>
+      </p:nvGrpSpPr>
+      <p:grpSpPr/>
+      <p:sp>
+        <p:nvSpPr>
+          <p:cNvPr id="2" name="Rectangle 1"/>
+          <p:cNvSpPr/>
+          <p:nvPr/>
+        </p:nvSpPr>
+        <p:spPr>
+          <a:xfrm>
+            <a:off x="0" y="0"/>
+            <a:ext cx="12191695" cy="6858000"/>
+          </a:xfrm>
+          <a:prstGeom prst="rect">
+            <a:avLst/>
+          </a:prstGeom>
+          <a:solidFill>
+            <a:srgbClr val="000000"/>
+          </a:solidFill>
+          <a:ln>
+            <a:noFill/>
+          </a:ln>
+        </p:spPr>
+        <p:style>
+          <a:lnRef idx="1">
+            <a:schemeClr val="accent1"/>
+          </a:lnRef>
+          <a:fillRef idx="3">
+            <a:schemeClr val="accent1"/>
+          </a:fillRef>
+          <a:effectRef idx="2">
+            <a:schemeClr val="accent1"/>
+          </a:effectRef>
+          <a:fontRef idx="minor">
+            <a:schemeClr val="lt1"/>
+          </a:fontRef>
+        </p:style>
+        <p:txBody>
+          <a:bodyPr rtlCol="0" anchor="ctr"/>
+          <a:lstStyle/>
+          <a:p>
+            <a:pPr algn="ctr"/>
+          </a:p>
+        </p:txBody>
+      </p:sp>
+      <p:pic>
+        <p:nvPicPr>
+          <p:cNvPr id="3" name="Picture 2" descr="ecomhouse-wordmark.png"/>
+          <p:cNvPicPr>
+            <a:picLocks noChangeAspect="1"/>
+          </p:cNvPicPr>
+          <p:nvPr/>
+        </p:nvPicPr>
+        <p:blipFill>
+          <a:blip r:embed="rId2"/>
+          <a:stretch>
+            <a:fillRect/>
+          </a:stretch>
+        </p:blipFill>
+        <p:spPr>
+          <a:xfrm>
+            <a:off x="292608" y="201168"/>
+            <a:ext cx="1873736" cy="201168"/>
+          </a:xfrm>
+          <a:prstGeom prst="rect">
+            <a:avLst/>
+          </a:prstGeom>
+        </p:spPr>
+      </p:pic>
+      <p:sp>
+        <p:nvSpPr>
+          <p:cNvPr id="4" name="TextBox 3"/>
+          <p:cNvSpPr txBox="1"/>
+          <p:nvPr/>
+        </p:nvSpPr>
+        <p:spPr>
+          <a:xfrm>
+            <a:off x="11475720" y="201168"/>
+            <a:ext cx="548640" cy="274320"/>
+          </a:xfrm>
+          <a:prstGeom prst="rect">
+            <a:avLst/>
+          </a:prstGeom>
+          <a:noFill/>
+        </p:spPr>
+        <p:txBody>
+          <a:bodyPr wrap="square" lIns="0" rIns="0" tIns="0" bIns="0" anchor="t">
+            <a:spAutoFit/>
+          </a:bodyPr>
+          <a:lstStyle/>
+          <a:p>
+            <a:pPr algn="r"/>
+            <a:r>
+              <a:rPr sz="1000" b="0" i="0">
+                <a:solidFill>
+                  <a:srgbClr val="EFEEEE"/>
+                </a:solidFill>
+                <a:latin typeface="Helvetica Neue"/>
+              </a:rPr>
+              <a:t>2026</a:t>
+            </a:r>
+          </a:p>
+        </p:txBody>
+      </p:sp>
+      <p:sp>
+        <p:nvSpPr>
+          <p:cNvPr id="5" name="TextBox 4"/>
+          <p:cNvSpPr txBox="1"/>
+          <p:nvPr/>
+        </p:nvSpPr>
+        <p:spPr>
+          <a:xfrm>
+            <a:off x="292608" y="6565392"/>
+            <a:ext cx="4114800" cy="228600"/>
+          </a:xfrm>
+          <a:prstGeom prst="rect">
+            <a:avLst/>
+          </a:prstGeom>
+          <a:noFill/>
+        </p:spPr>
+        <p:txBody>
+          <a:bodyPr wrap="square" lIns="0" rIns="0" tIns="0" bIns="0" anchor="t">
+            <a:spAutoFit/>
+          </a:bodyPr>
+          <a:lstStyle/>
+          <a:p>
+            <a:pPr algn="l"/>
+            <a:r>
+              <a:rPr sz="800" b="0" i="0" spc="150">
+                <a:solidFill>
+                  <a:srgbClr val="EFEEEE"/>
+                </a:solidFill>
+                <a:latin typeface="Helvetica Neue"/>
+              </a:rPr>
+              <a:t>ECOMHOUSE ©ALL RIGHTS RESERVED</a:t>
+            </a:r>
+          </a:p>
+        </p:txBody>
+      </p:sp>
+      <p:sp>
+        <p:nvSpPr>
+          <p:cNvPr id="6" name="TextBox 5"/>
+          <p:cNvSpPr txBox="1"/>
+          <p:nvPr/>
+        </p:nvSpPr>
+        <p:spPr>
+          <a:xfrm>
+            <a:off x="11475720" y="6565392"/>
+            <a:ext cx="548640" cy="228600"/>
+          </a:xfrm>
+          <a:prstGeom prst="rect">
+            <a:avLst/>
+          </a:prstGeom>
+          <a:noFill/>
+        </p:spPr>
+        <p:txBody>
+          <a:bodyPr wrap="square" lIns="0" rIns="0" tIns="0" bIns="0" anchor="t">
+            <a:spAutoFit/>
+          </a:bodyPr>
+          <a:lstStyle/>
+          <a:p>
+            <a:pPr algn="r"/>
+            <a:r>
+              <a:rPr sz="800" b="0" i="0">
+                <a:solidFill>
+                  <a:srgbClr val="EFEEEE"/>
+                </a:solidFill>
+                <a:latin typeface="Menlo"/>
+              </a:rPr>
+              <a:t>55</a:t>
+            </a:r>
+          </a:p>
+        </p:txBody>
+      </p:sp>
+      <p:sp>
+        <p:nvSpPr>
+          <p:cNvPr id="7" name="TextBox 6"/>
+          <p:cNvSpPr txBox="1"/>
+          <p:nvPr/>
+        </p:nvSpPr>
+        <p:spPr>
+          <a:xfrm>
+            <a:off x="640080" y="566928"/>
+            <a:ext cx="10911535" cy="228600"/>
+          </a:xfrm>
+          <a:prstGeom prst="rect">
+            <a:avLst/>
+          </a:prstGeom>
+          <a:noFill/>
+        </p:spPr>
+        <p:txBody>
+          <a:bodyPr wrap="square" lIns="0" rIns="0" tIns="0" bIns="0" anchor="t">
+            <a:spAutoFit/>
+          </a:bodyPr>
+          <a:lstStyle/>
+          <a:p>
+            <a:pPr algn="ctr"/>
+            <a:r>
+              <a:rPr sz="1000" b="1" i="0" spc="300">
+                <a:solidFill>
+                  <a:srgbClr val="F7D007"/>
+                </a:solidFill>
+                <a:latin typeface="Helvetica Neue"/>
+              </a:rPr>
+              <a:t>Working With EcomHouse · Compensation</a:t>
+            </a:r>
+          </a:p>
+        </p:txBody>
+      </p:sp>
+      <p:sp>
+        <p:nvSpPr>
+          <p:cNvPr id="8" name="TextBox 7"/>
+          <p:cNvSpPr txBox="1"/>
+          <p:nvPr/>
+        </p:nvSpPr>
+        <p:spPr>
+          <a:xfrm>
+            <a:off x="640080" y="841248"/>
+            <a:ext cx="10911535" cy="640080"/>
+          </a:xfrm>
+          <a:prstGeom prst="rect">
+            <a:avLst/>
+          </a:prstGeom>
+          <a:noFill/>
+        </p:spPr>
+        <p:txBody>
+          <a:bodyPr wrap="square" lIns="0" rIns="0" tIns="0" bIns="0" anchor="t">
+            <a:spAutoFit/>
+          </a:bodyPr>
+          <a:lstStyle/>
+          <a:p>
+            <a:pPr algn="ctr"/>
+            <a:r>
+              <a:rPr sz="3000" b="1" i="0" spc="-50">
+                <a:solidFill>
+                  <a:srgbClr val="FFFFFF"/>
+                </a:solidFill>
+                <a:latin typeface="Helvetica Neue"/>
+              </a:rPr>
+              <a:t>We Win When You Win</a:t>
+            </a:r>
+          </a:p>
+        </p:txBody>
+      </p:sp>
+      <p:sp>
+        <p:nvSpPr>
+          <p:cNvPr id="9" name="TextBox 8"/>
+          <p:cNvSpPr txBox="1"/>
+          <p:nvPr/>
+        </p:nvSpPr>
+        <p:spPr>
+          <a:xfrm>
+            <a:off x="1828800" y="1463040"/>
+            <a:ext cx="8534095" cy="548640"/>
+          </a:xfrm>
+          <a:prstGeom prst="rect">
+            <a:avLst/>
+          </a:prstGeom>
+          <a:noFill/>
+        </p:spPr>
+        <p:txBody>
+          <a:bodyPr wrap="square" lIns="0" rIns="0" tIns="0" bIns="0" anchor="t">
+            <a:spAutoFit/>
+          </a:bodyPr>
+          <a:lstStyle/>
+          <a:p>
+            <a:pPr algn="ctr"/>
+            <a:r>
+              <a:rPr sz="1200" b="0" i="0">
+                <a:solidFill>
+                  <a:srgbClr val="999999"/>
+                </a:solidFill>
+                <a:latin typeface="Helvetica Neue"/>
+              </a:rPr>
+              <a:t>A performance based fee on every winning test rolled out to 100% of traffic. One time charge per test, no attribution window, no recurring tail.</a:t>
+            </a:r>
+          </a:p>
+        </p:txBody>
+      </p:sp>
+      <p:sp>
+        <p:nvSpPr>
+          <p:cNvPr id="10" name="Oval 9"/>
+          <p:cNvSpPr/>
+          <p:nvPr/>
+        </p:nvSpPr>
+        <p:spPr>
+          <a:xfrm>
+            <a:off x="777240" y="2112264"/>
+            <a:ext cx="100584" cy="100584"/>
+          </a:xfrm>
+          <a:prstGeom prst="ellipse">
+            <a:avLst/>
+          </a:prstGeom>
+          <a:solidFill>
+            <a:srgbClr val="22C55E"/>
+          </a:solidFill>
+          <a:ln>
+            <a:noFill/>
+          </a:ln>
+        </p:spPr>
+        <p:style>
+          <a:lnRef idx="1">
+            <a:schemeClr val="accent1"/>
+          </a:lnRef>
+          <a:fillRef idx="3">
+            <a:schemeClr val="accent1"/>
+          </a:fillRef>
+          <a:effectRef idx="2">
+            <a:schemeClr val="accent1"/>
+          </a:effectRef>
+          <a:fontRef idx="minor">
+            <a:schemeClr val="lt1"/>
+          </a:fontRef>
+        </p:style>
+        <p:txBody>
+          <a:bodyPr rtlCol="0" anchor="ctr"/>
+          <a:lstStyle/>
+          <a:p>
+            <a:pPr algn="ctr"/>
+          </a:p>
+        </p:txBody>
+      </p:sp>
+      <p:sp>
+        <p:nvSpPr>
+          <p:cNvPr id="11" name="TextBox 10"/>
+          <p:cNvSpPr txBox="1"/>
+          <p:nvPr/>
+        </p:nvSpPr>
+        <p:spPr>
+          <a:xfrm>
+            <a:off x="1051560" y="2066544"/>
+            <a:ext cx="10332720" cy="822960"/>
+          </a:xfrm>
+          <a:prstGeom prst="rect">
+            <a:avLst/>
+          </a:prstGeom>
+          <a:noFill/>
+        </p:spPr>
+        <p:txBody>
+          <a:bodyPr wrap="square" lIns="0" rIns="0" tIns="0" bIns="0" anchor="t">
+            <a:spAutoFit/>
+          </a:bodyPr>
+          <a:lstStyle/>
+          <a:p>
+            <a:pPr algn="l">
+              <a:lnSpc>
+                <a:spcPct val="105000"/>
+              </a:lnSpc>
+            </a:pPr>
+            <a:r>
+              <a:rPr sz="1050" b="1" i="0">
+                <a:solidFill>
+                  <a:srgbClr val="FFFFFF"/>
+                </a:solidFill>
+                <a:latin typeface="Helvetica Neue"/>
+              </a:rPr>
+              <a:t>Calculated from your own data. </a:t>
+            </a:r>
+            <a:r>
+              <a:rPr sz="1050" b="0" i="0">
+                <a:solidFill>
+                  <a:srgbClr val="CCCCCC"/>
+                </a:solidFill>
+                <a:latin typeface="Helvetica Neue"/>
+              </a:rPr>
+              <a:t>The fee is a percentage of the test's estimated monthly revenue uplift, with the agreed stage multiplier from Schedule A applied for upper funnel tests where uplift is projected rather than directly measured.</a:t>
+            </a:r>
+          </a:p>
+        </p:txBody>
+      </p:sp>
+      <p:sp>
+        <p:nvSpPr>
+          <p:cNvPr id="12" name="Oval 11"/>
+          <p:cNvSpPr/>
+          <p:nvPr/>
+        </p:nvSpPr>
+        <p:spPr>
+          <a:xfrm>
+            <a:off x="777240" y="2551176"/>
+            <a:ext cx="100584" cy="100584"/>
+          </a:xfrm>
+          <a:prstGeom prst="ellipse">
+            <a:avLst/>
+          </a:prstGeom>
+          <a:solidFill>
+            <a:srgbClr val="22C55E"/>
+          </a:solidFill>
+          <a:ln>
+            <a:noFill/>
+          </a:ln>
+        </p:spPr>
+        <p:style>
+          <a:lnRef idx="1">
+            <a:schemeClr val="accent1"/>
+          </a:lnRef>
+          <a:fillRef idx="3">
+            <a:schemeClr val="accent1"/>
+          </a:fillRef>
+          <a:effectRef idx="2">
+            <a:schemeClr val="accent1"/>
+          </a:effectRef>
+          <a:fontRef idx="minor">
+            <a:schemeClr val="lt1"/>
+          </a:fontRef>
+        </p:style>
+        <p:txBody>
+          <a:bodyPr rtlCol="0" anchor="ctr"/>
+          <a:lstStyle/>
+          <a:p>
+            <a:pPr algn="ctr"/>
+          </a:p>
+        </p:txBody>
+      </p:sp>
+      <p:sp>
+        <p:nvSpPr>
+          <p:cNvPr id="13" name="TextBox 12"/>
+          <p:cNvSpPr txBox="1"/>
+          <p:nvPr/>
+        </p:nvSpPr>
+        <p:spPr>
+          <a:xfrm>
+            <a:off x="1051560" y="2505456"/>
+            <a:ext cx="10332720" cy="822960"/>
+          </a:xfrm>
+          <a:prstGeom prst="rect">
+            <a:avLst/>
+          </a:prstGeom>
+          <a:noFill/>
+        </p:spPr>
+        <p:txBody>
+          <a:bodyPr wrap="square" lIns="0" rIns="0" tIns="0" bIns="0" anchor="t">
+            <a:spAutoFit/>
+          </a:bodyPr>
+          <a:lstStyle/>
+          <a:p>
+            <a:pPr algn="l">
+              <a:lnSpc>
+                <a:spcPct val="105000"/>
+              </a:lnSpc>
+            </a:pPr>
+            <a:r>
+              <a:rPr sz="1050" b="1" i="0">
+                <a:solidFill>
+                  <a:srgbClr val="FFFFFF"/>
+                </a:solidFill>
+                <a:latin typeface="Helvetica Neue"/>
+              </a:rPr>
+              <a:t>No recurring tail, no attribution window. </a:t>
+            </a:r>
+            <a:r>
+              <a:rPr sz="1050" b="0" i="0">
+                <a:solidFill>
+                  <a:srgbClr val="CCCCCC"/>
+                </a:solidFill>
+                <a:latin typeface="Helvetica Neue"/>
+              </a:rPr>
+              <a:t>One invoice per winning test on rollout, in SEK, never a monthly percentage of revenue.</a:t>
+            </a:r>
+          </a:p>
+        </p:txBody>
+      </p:sp>
+      <p:sp>
+        <p:nvSpPr>
+          <p:cNvPr id="14" name="Oval 13"/>
+          <p:cNvSpPr/>
+          <p:nvPr/>
+        </p:nvSpPr>
+        <p:spPr>
+          <a:xfrm>
+            <a:off x="777240" y="2802635"/>
+            <a:ext cx="100584" cy="100584"/>
+          </a:xfrm>
+          <a:prstGeom prst="ellipse">
+            <a:avLst/>
+          </a:prstGeom>
+          <a:solidFill>
+            <a:srgbClr val="22C55E"/>
+          </a:solidFill>
+          <a:ln>
+            <a:noFill/>
+          </a:ln>
+        </p:spPr>
+        <p:style>
+          <a:lnRef idx="1">
+            <a:schemeClr val="accent1"/>
+          </a:lnRef>
+          <a:fillRef idx="3">
+            <a:schemeClr val="accent1"/>
+          </a:fillRef>
+          <a:effectRef idx="2">
+            <a:schemeClr val="accent1"/>
+          </a:effectRef>
+          <a:fontRef idx="minor">
+            <a:schemeClr val="lt1"/>
+          </a:fontRef>
+        </p:style>
+        <p:txBody>
+          <a:bodyPr rtlCol="0" anchor="ctr"/>
+          <a:lstStyle/>
+          <a:p>
+            <a:pPr algn="ctr"/>
+          </a:p>
+        </p:txBody>
+      </p:sp>
+      <p:sp>
+        <p:nvSpPr>
+          <p:cNvPr id="15" name="TextBox 14"/>
+          <p:cNvSpPr txBox="1"/>
+          <p:nvPr/>
+        </p:nvSpPr>
+        <p:spPr>
+          <a:xfrm>
+            <a:off x="1051560" y="2756915"/>
+            <a:ext cx="10332720" cy="822960"/>
+          </a:xfrm>
+          <a:prstGeom prst="rect">
+            <a:avLst/>
+          </a:prstGeom>
+          <a:noFill/>
+        </p:spPr>
+        <p:txBody>
+          <a:bodyPr wrap="square" lIns="0" rIns="0" tIns="0" bIns="0" anchor="t">
+            <a:spAutoFit/>
+          </a:bodyPr>
+          <a:lstStyle/>
+          <a:p>
+            <a:pPr algn="l">
+              <a:lnSpc>
+                <a:spcPct val="105000"/>
+              </a:lnSpc>
+            </a:pPr>
+            <a:r>
+              <a:rPr sz="1050" b="1" i="0">
+                <a:solidFill>
+                  <a:srgbClr val="FFFFFF"/>
+                </a:solidFill>
+                <a:latin typeface="Helvetica Neue"/>
+              </a:rPr>
+              <a:t>Optional fixed monthly retainer </a:t>
+            </a:r>
+            <a:r>
+              <a:rPr sz="1050" b="0" i="0">
+                <a:solidFill>
+                  <a:srgbClr val="CCCCCC"/>
+                </a:solidFill>
+                <a:latin typeface="Helvetica Neue"/>
+              </a:rPr>
+              <a:t>in SEK if you prefer a predictable budget. It can stack with the performance fee or replace it, and it is void unless agreed.</a:t>
+            </a:r>
+          </a:p>
+        </p:txBody>
+      </p:sp>
+    </p:spTree>
+  </p:cSld>
+  <p:clrMapOvr>
+    <a:masterClrMapping/>
+  </p:clrMapOvr>
+</p:sld>
+</file>
+
+<file path=ppt/slides/slide57.xml><?xml version="1.0" encoding="utf-8"?>
+<p:sld xmlns:a="http://schemas.openxmlformats.org/drawingml/2006/main" xmlns:p="http://schemas.openxmlformats.org/presentationml/2006/main" xmlns:r="http://schemas.openxmlformats.org/officeDocument/2006/relationships">
+  <p:cSld>
+    <p:spTree>
+      <p:nvGrpSpPr>
+        <p:cNvPr id="1" name=""/>
+        <p:cNvGrpSpPr/>
+        <p:nvPr/>
+      </p:nvGrpSpPr>
+      <p:grpSpPr/>
+      <p:sp>
+        <p:nvSpPr>
+          <p:cNvPr id="2" name="Rectangle 1"/>
+          <p:cNvSpPr/>
+          <p:nvPr/>
+        </p:nvSpPr>
+        <p:spPr>
+          <a:xfrm>
+            <a:off x="0" y="0"/>
+            <a:ext cx="12191695" cy="6858000"/>
+          </a:xfrm>
+          <a:prstGeom prst="rect">
+            <a:avLst/>
+          </a:prstGeom>
+          <a:solidFill>
+            <a:srgbClr val="000000"/>
+          </a:solidFill>
+          <a:ln>
+            <a:noFill/>
+          </a:ln>
+        </p:spPr>
+        <p:style>
+          <a:lnRef idx="1">
+            <a:schemeClr val="accent1"/>
+          </a:lnRef>
+          <a:fillRef idx="3">
+            <a:schemeClr val="accent1"/>
+          </a:fillRef>
+          <a:effectRef idx="2">
+            <a:schemeClr val="accent1"/>
+          </a:effectRef>
+          <a:fontRef idx="minor">
+            <a:schemeClr val="lt1"/>
+          </a:fontRef>
+        </p:style>
+        <p:txBody>
+          <a:bodyPr rtlCol="0" anchor="ctr"/>
+          <a:lstStyle/>
+          <a:p>
+            <a:pPr algn="ctr"/>
+          </a:p>
+        </p:txBody>
+      </p:sp>
+      <p:pic>
+        <p:nvPicPr>
+          <p:cNvPr id="3" name="Picture 2" descr="ecomhouse-wordmark.png"/>
+          <p:cNvPicPr>
+            <a:picLocks noChangeAspect="1"/>
+          </p:cNvPicPr>
+          <p:nvPr/>
+        </p:nvPicPr>
+        <p:blipFill>
+          <a:blip r:embed="rId2"/>
+          <a:stretch>
+            <a:fillRect/>
+          </a:stretch>
+        </p:blipFill>
+        <p:spPr>
+          <a:xfrm>
+            <a:off x="292608" y="201168"/>
+            <a:ext cx="1873736" cy="201168"/>
+          </a:xfrm>
+          <a:prstGeom prst="rect">
+            <a:avLst/>
+          </a:prstGeom>
+        </p:spPr>
+      </p:pic>
+      <p:sp>
+        <p:nvSpPr>
+          <p:cNvPr id="4" name="TextBox 3"/>
+          <p:cNvSpPr txBox="1"/>
+          <p:nvPr/>
+        </p:nvSpPr>
+        <p:spPr>
+          <a:xfrm>
+            <a:off x="11475720" y="201168"/>
+            <a:ext cx="548640" cy="274320"/>
+          </a:xfrm>
+          <a:prstGeom prst="rect">
+            <a:avLst/>
+          </a:prstGeom>
+          <a:noFill/>
+        </p:spPr>
+        <p:txBody>
+          <a:bodyPr wrap="square" lIns="0" rIns="0" tIns="0" bIns="0" anchor="t">
+            <a:spAutoFit/>
+          </a:bodyPr>
+          <a:lstStyle/>
+          <a:p>
+            <a:pPr algn="r"/>
+            <a:r>
+              <a:rPr sz="1000" b="0" i="0">
+                <a:solidFill>
+                  <a:srgbClr val="EFEEEE"/>
+                </a:solidFill>
+                <a:latin typeface="Helvetica Neue"/>
+              </a:rPr>
+              <a:t>2026</a:t>
+            </a:r>
+          </a:p>
+        </p:txBody>
+      </p:sp>
+      <p:sp>
+        <p:nvSpPr>
+          <p:cNvPr id="5" name="TextBox 4"/>
+          <p:cNvSpPr txBox="1"/>
+          <p:nvPr/>
+        </p:nvSpPr>
+        <p:spPr>
+          <a:xfrm>
+            <a:off x="292608" y="6565392"/>
+            <a:ext cx="4114800" cy="228600"/>
+          </a:xfrm>
+          <a:prstGeom prst="rect">
+            <a:avLst/>
+          </a:prstGeom>
+          <a:noFill/>
+        </p:spPr>
+        <p:txBody>
+          <a:bodyPr wrap="square" lIns="0" rIns="0" tIns="0" bIns="0" anchor="t">
+            <a:spAutoFit/>
+          </a:bodyPr>
+          <a:lstStyle/>
+          <a:p>
+            <a:pPr algn="l"/>
+            <a:r>
+              <a:rPr sz="800" b="0" i="0" spc="150">
+                <a:solidFill>
+                  <a:srgbClr val="EFEEEE"/>
+                </a:solidFill>
+                <a:latin typeface="Helvetica Neue"/>
+              </a:rPr>
+              <a:t>ECOMHOUSE ©ALL RIGHTS RESERVED</a:t>
+            </a:r>
+          </a:p>
+        </p:txBody>
+      </p:sp>
+      <p:sp>
+        <p:nvSpPr>
+          <p:cNvPr id="6" name="TextBox 5"/>
+          <p:cNvSpPr txBox="1"/>
+          <p:nvPr/>
+        </p:nvSpPr>
+        <p:spPr>
+          <a:xfrm>
+            <a:off x="11475720" y="6565392"/>
+            <a:ext cx="548640" cy="228600"/>
+          </a:xfrm>
+          <a:prstGeom prst="rect">
+            <a:avLst/>
+          </a:prstGeom>
+          <a:noFill/>
+        </p:spPr>
+        <p:txBody>
+          <a:bodyPr wrap="square" lIns="0" rIns="0" tIns="0" bIns="0" anchor="t">
+            <a:spAutoFit/>
+          </a:bodyPr>
+          <a:lstStyle/>
+          <a:p>
+            <a:pPr algn="r"/>
+            <a:r>
+              <a:rPr sz="800" b="0" i="0">
+                <a:solidFill>
+                  <a:srgbClr val="EFEEEE"/>
+                </a:solidFill>
+                <a:latin typeface="Menlo"/>
+              </a:rPr>
+              <a:t>56</a:t>
+            </a:r>
+          </a:p>
+        </p:txBody>
+      </p:sp>
+      <p:sp>
+        <p:nvSpPr>
           <p:cNvPr id="7" name="Oval 6"/>
           <p:cNvSpPr/>
           <p:nvPr/>
